--- a/docs/2024-12-02_Background.pptx
+++ b/docs/2024-12-02_Background.pptx
@@ -10,11 +10,11 @@
     <p:sldId id="261" r:id="rId4"/>
     <p:sldId id="268" r:id="rId5"/>
     <p:sldId id="257" r:id="rId6"/>
-    <p:sldId id="258" r:id="rId7"/>
-    <p:sldId id="259" r:id="rId8"/>
-    <p:sldId id="263" r:id="rId9"/>
-    <p:sldId id="265" r:id="rId10"/>
-    <p:sldId id="266" r:id="rId11"/>
+    <p:sldId id="263" r:id="rId7"/>
+    <p:sldId id="265" r:id="rId8"/>
+    <p:sldId id="266" r:id="rId9"/>
+    <p:sldId id="258" r:id="rId10"/>
+    <p:sldId id="259" r:id="rId11"/>
   </p:sldIdLst>
   <p:sldSz cx="12192000" cy="6858000"/>
   <p:notesSz cx="6858000" cy="9144000"/>
@@ -270,7 +270,7 @@
           <a:p>
             <a:fld id="{C2A14209-DDC5-4466-AD2B-718302D4640B}" type="datetimeFigureOut">
               <a:rPr lang="en-DE" smtClean="0"/>
-              <a:t>05/02/2026</a:t>
+              <a:t>27/02/2026</a:t>
             </a:fld>
             <a:endParaRPr lang="en-DE"/>
           </a:p>
@@ -470,7 +470,7 @@
           <a:p>
             <a:fld id="{C2A14209-DDC5-4466-AD2B-718302D4640B}" type="datetimeFigureOut">
               <a:rPr lang="en-DE" smtClean="0"/>
-              <a:t>05/02/2026</a:t>
+              <a:t>27/02/2026</a:t>
             </a:fld>
             <a:endParaRPr lang="en-DE"/>
           </a:p>
@@ -680,7 +680,7 @@
           <a:p>
             <a:fld id="{C2A14209-DDC5-4466-AD2B-718302D4640B}" type="datetimeFigureOut">
               <a:rPr lang="en-DE" smtClean="0"/>
-              <a:t>05/02/2026</a:t>
+              <a:t>27/02/2026</a:t>
             </a:fld>
             <a:endParaRPr lang="en-DE"/>
           </a:p>
@@ -880,7 +880,7 @@
           <a:p>
             <a:fld id="{C2A14209-DDC5-4466-AD2B-718302D4640B}" type="datetimeFigureOut">
               <a:rPr lang="en-DE" smtClean="0"/>
-              <a:t>05/02/2026</a:t>
+              <a:t>27/02/2026</a:t>
             </a:fld>
             <a:endParaRPr lang="en-DE"/>
           </a:p>
@@ -1156,7 +1156,7 @@
           <a:p>
             <a:fld id="{C2A14209-DDC5-4466-AD2B-718302D4640B}" type="datetimeFigureOut">
               <a:rPr lang="en-DE" smtClean="0"/>
-              <a:t>05/02/2026</a:t>
+              <a:t>27/02/2026</a:t>
             </a:fld>
             <a:endParaRPr lang="en-DE"/>
           </a:p>
@@ -1424,7 +1424,7 @@
           <a:p>
             <a:fld id="{C2A14209-DDC5-4466-AD2B-718302D4640B}" type="datetimeFigureOut">
               <a:rPr lang="en-DE" smtClean="0"/>
-              <a:t>05/02/2026</a:t>
+              <a:t>27/02/2026</a:t>
             </a:fld>
             <a:endParaRPr lang="en-DE"/>
           </a:p>
@@ -1839,7 +1839,7 @@
           <a:p>
             <a:fld id="{C2A14209-DDC5-4466-AD2B-718302D4640B}" type="datetimeFigureOut">
               <a:rPr lang="en-DE" smtClean="0"/>
-              <a:t>05/02/2026</a:t>
+              <a:t>27/02/2026</a:t>
             </a:fld>
             <a:endParaRPr lang="en-DE"/>
           </a:p>
@@ -1981,7 +1981,7 @@
           <a:p>
             <a:fld id="{C2A14209-DDC5-4466-AD2B-718302D4640B}" type="datetimeFigureOut">
               <a:rPr lang="en-DE" smtClean="0"/>
-              <a:t>05/02/2026</a:t>
+              <a:t>27/02/2026</a:t>
             </a:fld>
             <a:endParaRPr lang="en-DE"/>
           </a:p>
@@ -2094,7 +2094,7 @@
           <a:p>
             <a:fld id="{C2A14209-DDC5-4466-AD2B-718302D4640B}" type="datetimeFigureOut">
               <a:rPr lang="en-DE" smtClean="0"/>
-              <a:t>05/02/2026</a:t>
+              <a:t>27/02/2026</a:t>
             </a:fld>
             <a:endParaRPr lang="en-DE"/>
           </a:p>
@@ -2407,7 +2407,7 @@
           <a:p>
             <a:fld id="{C2A14209-DDC5-4466-AD2B-718302D4640B}" type="datetimeFigureOut">
               <a:rPr lang="en-DE" smtClean="0"/>
-              <a:t>05/02/2026</a:t>
+              <a:t>27/02/2026</a:t>
             </a:fld>
             <a:endParaRPr lang="en-DE"/>
           </a:p>
@@ -2696,7 +2696,7 @@
           <a:p>
             <a:fld id="{C2A14209-DDC5-4466-AD2B-718302D4640B}" type="datetimeFigureOut">
               <a:rPr lang="en-DE" smtClean="0"/>
-              <a:t>05/02/2026</a:t>
+              <a:t>27/02/2026</a:t>
             </a:fld>
             <a:endParaRPr lang="en-DE"/>
           </a:p>
@@ -2939,7 +2939,7 @@
           <a:p>
             <a:fld id="{C2A14209-DDC5-4466-AD2B-718302D4640B}" type="datetimeFigureOut">
               <a:rPr lang="en-DE" smtClean="0"/>
-              <a:t>05/02/2026</a:t>
+              <a:t>27/02/2026</a:t>
             </a:fld>
             <a:endParaRPr lang="en-DE"/>
           </a:p>
@@ -3485,7 +3485,13 @@
   <p:cSld>
     <p:spTree>
       <p:nvGrpSpPr>
-        <p:cNvPr id="1" name=""/>
+        <p:cNvPr id="1" name="">
+          <a:extLst>
+            <a:ext uri="{FF2B5EF4-FFF2-40B4-BE49-F238E27FC236}">
+              <a16:creationId xmlns:a16="http://schemas.microsoft.com/office/drawing/2014/main" id="{4817A581-C4E7-D5E0-5D83-999057C9672E}"/>
+            </a:ext>
+          </a:extLst>
+        </p:cNvPr>
         <p:cNvGrpSpPr/>
         <p:nvPr/>
       </p:nvGrpSpPr>
@@ -3499,10 +3505,10 @@
       </p:grpSpPr>
       <p:sp>
         <p:nvSpPr>
-          <p:cNvPr id="4" name="Title 3">
-            <a:extLst>
-              <a:ext uri="{FF2B5EF4-FFF2-40B4-BE49-F238E27FC236}">
-                <a16:creationId xmlns:a16="http://schemas.microsoft.com/office/drawing/2014/main" id="{B7C71F2F-129F-7804-A476-B72A202AC412}"/>
+          <p:cNvPr id="2" name="Title 1">
+            <a:extLst>
+              <a:ext uri="{FF2B5EF4-FFF2-40B4-BE49-F238E27FC236}">
+                <a16:creationId xmlns:a16="http://schemas.microsoft.com/office/drawing/2014/main" id="{0EB557D1-4688-4F90-CF24-2EFE8B7CD674}"/>
               </a:ext>
             </a:extLst>
           </p:cNvPr>
@@ -3519,48 +3525,815 @@
           <a:lstStyle/>
           <a:p>
             <a:r>
-              <a:rPr lang="en-US" dirty="0" err="1"/>
+              <a:rPr lang="en-US" dirty="0"/>
+              <a:t>LOD-related arguments</a:t>
+            </a:r>
+            <a:endParaRPr lang="en-DE" dirty="0"/>
+          </a:p>
+        </p:txBody>
+      </p:sp>
+      <p:sp>
+        <p:nvSpPr>
+          <p:cNvPr id="8" name="Arrow: Left-Right 7">
+            <a:extLst>
+              <a:ext uri="{FF2B5EF4-FFF2-40B4-BE49-F238E27FC236}">
+                <a16:creationId xmlns:a16="http://schemas.microsoft.com/office/drawing/2014/main" id="{F60BACAC-6312-7E99-09DE-D68EAC174191}"/>
+              </a:ext>
+            </a:extLst>
+          </p:cNvPr>
+          <p:cNvSpPr/>
+          <p:nvPr/>
+        </p:nvSpPr>
+        <p:spPr>
+          <a:xfrm>
+            <a:off x="838199" y="1301265"/>
+            <a:ext cx="10515599" cy="559803"/>
+          </a:xfrm>
+          <a:prstGeom prst="leftRightArrow">
+            <a:avLst/>
+          </a:prstGeom>
+          <a:solidFill>
+            <a:schemeClr val="bg1">
+              <a:lumMod val="95000"/>
+            </a:schemeClr>
+          </a:solidFill>
+          <a:ln>
+            <a:solidFill>
+              <a:schemeClr val="tx1"/>
+            </a:solidFill>
+          </a:ln>
+        </p:spPr>
+        <p:style>
+          <a:lnRef idx="2">
+            <a:schemeClr val="accent1">
+              <a:shade val="15000"/>
+            </a:schemeClr>
+          </a:lnRef>
+          <a:fillRef idx="1">
+            <a:schemeClr val="accent1"/>
+          </a:fillRef>
+          <a:effectRef idx="0">
+            <a:schemeClr val="accent1"/>
+          </a:effectRef>
+          <a:fontRef idx="minor">
+            <a:schemeClr val="lt1"/>
+          </a:fontRef>
+        </p:style>
+        <p:txBody>
+          <a:bodyPr rtlCol="0" anchor="ctr"/>
+          <a:lstStyle/>
+          <a:p>
+            <a:pPr algn="ctr"/>
+            <a:r>
+              <a:rPr lang="en-US" dirty="0">
+                <a:solidFill>
+                  <a:schemeClr val="tx1"/>
+                </a:solidFill>
+              </a:rPr>
+              <a:t>Inheritance of arguments across all Levels Of Detail</a:t>
+            </a:r>
+            <a:endParaRPr lang="en-DE" dirty="0">
+              <a:solidFill>
+                <a:schemeClr val="tx1"/>
+              </a:solidFill>
+            </a:endParaRPr>
+          </a:p>
+        </p:txBody>
+      </p:sp>
+      <p:sp>
+        <p:nvSpPr>
+          <p:cNvPr id="5" name="TextBox 4">
+            <a:extLst>
+              <a:ext uri="{FF2B5EF4-FFF2-40B4-BE49-F238E27FC236}">
+                <a16:creationId xmlns:a16="http://schemas.microsoft.com/office/drawing/2014/main" id="{69200804-C828-E420-5EDC-46A30AB681B5}"/>
+              </a:ext>
+            </a:extLst>
+          </p:cNvPr>
+          <p:cNvSpPr txBox="1"/>
+          <p:nvPr/>
+        </p:nvSpPr>
+        <p:spPr>
+          <a:xfrm>
+            <a:off x="838200" y="3429000"/>
+            <a:ext cx="10515598" cy="1200329"/>
+          </a:xfrm>
+          <a:prstGeom prst="rect">
+            <a:avLst/>
+          </a:prstGeom>
+          <a:noFill/>
+        </p:spPr>
+        <p:txBody>
+          <a:bodyPr wrap="square" rtlCol="0">
+            <a:spAutoFit/>
+          </a:bodyPr>
+          <a:lstStyle/>
+          <a:p>
+            <a:r>
+              <a:rPr lang="en-US" dirty="0"/>
+              <a:t>Arguments:</a:t>
+            </a:r>
+          </a:p>
+          <a:p>
+            <a:r>
+              <a:rPr lang="en-US" dirty="0">
+                <a:solidFill>
+                  <a:schemeClr val="accent5"/>
+                </a:solidFill>
+              </a:rPr>
+              <a:t>locality</a:t>
+            </a:r>
+            <a:r>
+              <a:rPr lang="en-US" dirty="0"/>
+              <a:t>, </a:t>
+            </a:r>
+            <a:r>
+              <a:rPr lang="en-US" dirty="0">
+                <a:solidFill>
+                  <a:schemeClr val="accent5"/>
+                </a:solidFill>
+              </a:rPr>
+              <a:t>country</a:t>
+            </a:r>
+            <a:r>
+              <a:rPr lang="en-US" dirty="0"/>
+              <a:t>, </a:t>
+            </a:r>
+            <a:r>
+              <a:rPr lang="en-US" dirty="0">
+                <a:solidFill>
+                  <a:schemeClr val="accent5"/>
+                </a:solidFill>
+              </a:rPr>
+              <a:t>continent</a:t>
+            </a:r>
+            <a:r>
+              <a:rPr lang="en-US" dirty="0"/>
+              <a:t>, </a:t>
+            </a:r>
+            <a:r>
+              <a:rPr lang="en-US" dirty="0">
+                <a:solidFill>
+                  <a:schemeClr val="accent5"/>
+                </a:solidFill>
+              </a:rPr>
+              <a:t>subcontinent</a:t>
+            </a:r>
+            <a:r>
+              <a:rPr lang="en-US" dirty="0"/>
+              <a:t>, </a:t>
+            </a:r>
+            <a:r>
+              <a:rPr lang="en-US" dirty="0" err="1">
+                <a:solidFill>
+                  <a:schemeClr val="accent5"/>
+                </a:solidFill>
+              </a:rPr>
+              <a:t>locality_type</a:t>
+            </a:r>
+            <a:r>
+              <a:rPr lang="en-US" dirty="0"/>
+              <a:t>, </a:t>
+            </a:r>
+            <a:r>
+              <a:rPr lang="en-US" sz="1800" dirty="0" err="1">
+                <a:solidFill>
+                  <a:schemeClr val="accent5"/>
+                </a:solidFill>
+              </a:rPr>
+              <a:t>assemblage_name</a:t>
+            </a:r>
+            <a:r>
+              <a:rPr lang="en-US" sz="1800" dirty="0"/>
+              <a:t>, </a:t>
+            </a:r>
+            <a:r>
+              <a:rPr lang="en-US" sz="1800" dirty="0" err="1">
+                <a:solidFill>
+                  <a:schemeClr val="accent5"/>
+                </a:solidFill>
+              </a:rPr>
+              <a:t>assemblage_id</a:t>
+            </a:r>
+            <a:r>
+              <a:rPr lang="en-US" sz="1800" dirty="0"/>
+              <a:t>, </a:t>
+            </a:r>
+            <a:r>
+              <a:rPr lang="en-US" sz="1800" dirty="0">
+                <a:solidFill>
+                  <a:schemeClr val="accent5"/>
+                </a:solidFill>
+              </a:rPr>
+              <a:t>culture</a:t>
+            </a:r>
+            <a:r>
+              <a:rPr lang="en-US" sz="1800" dirty="0"/>
+              <a:t>, </a:t>
+            </a:r>
+            <a:r>
+              <a:rPr lang="en-US" sz="1800" dirty="0" err="1">
+                <a:solidFill>
+                  <a:schemeClr val="accent5"/>
+                </a:solidFill>
+              </a:rPr>
+              <a:t>cultural_period</a:t>
+            </a:r>
+            <a:r>
+              <a:rPr lang="en-US" sz="1800" dirty="0"/>
+              <a:t>, </a:t>
+            </a:r>
+            <a:r>
+              <a:rPr lang="en-US" sz="1800" dirty="0">
+                <a:solidFill>
+                  <a:schemeClr val="accent5"/>
+                </a:solidFill>
+              </a:rPr>
+              <a:t>technology</a:t>
+            </a:r>
+            <a:r>
+              <a:rPr lang="en-US" sz="1800" dirty="0"/>
+              <a:t>, </a:t>
+            </a:r>
+            <a:r>
+              <a:rPr lang="en-US" sz="1800" dirty="0">
+                <a:solidFill>
+                  <a:schemeClr val="accent5"/>
+                </a:solidFill>
+              </a:rPr>
+              <a:t>typology</a:t>
+            </a:r>
+            <a:r>
+              <a:rPr lang="en-US" sz="1800" dirty="0"/>
+              <a:t>, </a:t>
+            </a:r>
+            <a:r>
+              <a:rPr lang="en-US" sz="1800" dirty="0" err="1">
+                <a:solidFill>
+                  <a:schemeClr val="accent5"/>
+                </a:solidFill>
+              </a:rPr>
+              <a:t>raw_material</a:t>
+            </a:r>
+            <a:r>
+              <a:rPr lang="en-US" sz="1800" dirty="0"/>
+              <a:t>, </a:t>
+            </a:r>
+            <a:r>
+              <a:rPr lang="en-US" sz="1800" dirty="0">
+                <a:solidFill>
+                  <a:schemeClr val="accent5"/>
+                </a:solidFill>
+              </a:rPr>
+              <a:t>function</a:t>
+            </a:r>
+            <a:r>
+              <a:rPr lang="en-US" sz="1800" dirty="0"/>
+              <a:t>, </a:t>
+            </a:r>
+            <a:r>
+              <a:rPr lang="en-US" sz="1800" dirty="0" err="1">
+                <a:solidFill>
+                  <a:schemeClr val="accent5"/>
+                </a:solidFill>
+              </a:rPr>
+              <a:t>miscalaneous_finds</a:t>
+            </a:r>
+            <a:r>
+              <a:rPr lang="en-US" sz="1800" dirty="0"/>
+              <a:t>, </a:t>
+            </a:r>
+            <a:r>
+              <a:rPr lang="en-US" sz="1800" dirty="0" err="1">
+                <a:solidFill>
+                  <a:schemeClr val="accent5"/>
+                </a:solidFill>
+              </a:rPr>
+              <a:t>organic_tools</a:t>
+            </a:r>
+            <a:r>
+              <a:rPr lang="en-US" sz="1800" dirty="0"/>
+              <a:t>, </a:t>
+            </a:r>
+            <a:r>
+              <a:rPr lang="en-US" sz="1800" dirty="0" err="1">
+                <a:solidFill>
+                  <a:schemeClr val="accent5"/>
+                </a:solidFill>
+              </a:rPr>
+              <a:t>symbolic_artifacts</a:t>
+            </a:r>
+            <a:r>
+              <a:rPr lang="en-US" sz="1800" dirty="0"/>
+              <a:t>, </a:t>
+            </a:r>
+            <a:r>
+              <a:rPr lang="en-US" sz="1800" dirty="0">
+                <a:solidFill>
+                  <a:schemeClr val="accent5"/>
+                </a:solidFill>
+              </a:rPr>
+              <a:t>feature</a:t>
+            </a:r>
+            <a:r>
+              <a:rPr lang="en-US" sz="1800" dirty="0"/>
+              <a:t>, </a:t>
+            </a:r>
+            <a:r>
+              <a:rPr lang="en-US" sz="1800" dirty="0" err="1">
+                <a:solidFill>
+                  <a:schemeClr val="accent5"/>
+                </a:solidFill>
+              </a:rPr>
+              <a:t>animal_remains</a:t>
+            </a:r>
+            <a:r>
+              <a:rPr lang="en-US" sz="1800" dirty="0"/>
+              <a:t>, </a:t>
+            </a:r>
+            <a:r>
+              <a:rPr lang="en-US" sz="1800" dirty="0" err="1">
+                <a:solidFill>
+                  <a:schemeClr val="accent5"/>
+                </a:solidFill>
+              </a:rPr>
+              <a:t>plant_remains</a:t>
+            </a:r>
+            <a:r>
+              <a:rPr lang="en-US" sz="1800" dirty="0"/>
+              <a:t>, </a:t>
+            </a:r>
+            <a:r>
+              <a:rPr lang="en-US" sz="1800" dirty="0" err="1">
+                <a:solidFill>
+                  <a:schemeClr val="accent5"/>
+                </a:solidFill>
+              </a:rPr>
+              <a:t>geolayer</a:t>
+            </a:r>
+            <a:r>
+              <a:rPr lang="en-US" sz="1800" dirty="0"/>
+              <a:t>, </a:t>
+            </a:r>
+            <a:r>
+              <a:rPr lang="en-US" sz="1800" dirty="0" err="1">
+                <a:solidFill>
+                  <a:schemeClr val="accent6"/>
+                </a:solidFill>
+              </a:rPr>
+              <a:t>age_min</a:t>
+            </a:r>
+            <a:r>
+              <a:rPr lang="en-US" sz="1800" dirty="0"/>
+              <a:t>, </a:t>
+            </a:r>
+            <a:r>
+              <a:rPr lang="en-US" sz="1800" dirty="0" err="1">
+                <a:solidFill>
+                  <a:schemeClr val="accent6"/>
+                </a:solidFill>
+              </a:rPr>
+              <a:t>age_max</a:t>
+            </a:r>
+            <a:r>
+              <a:rPr lang="en-US" sz="1800" dirty="0"/>
+              <a:t>;</a:t>
+            </a:r>
+            <a:endParaRPr lang="en-DE" dirty="0"/>
+          </a:p>
+        </p:txBody>
+      </p:sp>
+      <p:sp>
+        <p:nvSpPr>
+          <p:cNvPr id="19" name="TextBox 18">
+            <a:extLst>
+              <a:ext uri="{FF2B5EF4-FFF2-40B4-BE49-F238E27FC236}">
+                <a16:creationId xmlns:a16="http://schemas.microsoft.com/office/drawing/2014/main" id="{528D9342-1505-8E1F-14A3-4BA121E7250E}"/>
+              </a:ext>
+            </a:extLst>
+          </p:cNvPr>
+          <p:cNvSpPr txBox="1"/>
+          <p:nvPr/>
+        </p:nvSpPr>
+        <p:spPr>
+          <a:xfrm>
+            <a:off x="0" y="5688449"/>
+            <a:ext cx="1429366" cy="1169551"/>
+          </a:xfrm>
+          <a:prstGeom prst="rect">
+            <a:avLst/>
+          </a:prstGeom>
+          <a:noFill/>
+          <a:ln>
+            <a:solidFill>
+              <a:schemeClr val="tx1"/>
+            </a:solidFill>
+            <a:prstDash val="dash"/>
+          </a:ln>
+        </p:spPr>
+        <p:txBody>
+          <a:bodyPr wrap="none" rtlCol="0">
+            <a:spAutoFit/>
+          </a:bodyPr>
+          <a:lstStyle/>
+          <a:p>
+            <a:r>
+              <a:rPr lang="en-US" sz="1400" dirty="0"/>
+              <a:t>Color key:</a:t>
+            </a:r>
+          </a:p>
+          <a:p>
+            <a:r>
+              <a:rPr lang="en-US" sz="1400" dirty="0">
+                <a:solidFill>
+                  <a:schemeClr val="accent1"/>
+                </a:solidFill>
+              </a:rPr>
+              <a:t>Character string</a:t>
+            </a:r>
+          </a:p>
+          <a:p>
+            <a:r>
+              <a:rPr lang="en-US" sz="1400" dirty="0">
+                <a:solidFill>
+                  <a:schemeClr val="accent6"/>
+                </a:solidFill>
+              </a:rPr>
+              <a:t>Numeric</a:t>
+            </a:r>
+          </a:p>
+          <a:p>
+            <a:r>
+              <a:rPr lang="en-US" sz="1400" dirty="0">
+                <a:solidFill>
+                  <a:schemeClr val="accent2"/>
+                </a:solidFill>
+              </a:rPr>
+              <a:t>Boolean</a:t>
+            </a:r>
+          </a:p>
+          <a:p>
+            <a:r>
+              <a:rPr lang="en-US" sz="1400" dirty="0">
+                <a:solidFill>
+                  <a:schemeClr val="accent5"/>
+                </a:solidFill>
+              </a:rPr>
+              <a:t>List</a:t>
+            </a:r>
+          </a:p>
+        </p:txBody>
+      </p:sp>
+      <p:sp>
+        <p:nvSpPr>
+          <p:cNvPr id="20" name="Rectangle 19">
+            <a:extLst>
+              <a:ext uri="{FF2B5EF4-FFF2-40B4-BE49-F238E27FC236}">
+                <a16:creationId xmlns:a16="http://schemas.microsoft.com/office/drawing/2014/main" id="{1CA55825-769B-1D16-2DA1-90F7182C6CF9}"/>
+              </a:ext>
+            </a:extLst>
+          </p:cNvPr>
+          <p:cNvSpPr/>
+          <p:nvPr/>
+        </p:nvSpPr>
+        <p:spPr>
+          <a:xfrm>
+            <a:off x="838200" y="1957756"/>
+            <a:ext cx="2696308" cy="1078524"/>
+          </a:xfrm>
+          <a:prstGeom prst="rect">
+            <a:avLst/>
+          </a:prstGeom>
+          <a:solidFill>
+            <a:schemeClr val="bg1">
+              <a:lumMod val="95000"/>
+            </a:schemeClr>
+          </a:solidFill>
+        </p:spPr>
+        <p:style>
+          <a:lnRef idx="2">
+            <a:schemeClr val="accent1">
+              <a:shade val="15000"/>
+            </a:schemeClr>
+          </a:lnRef>
+          <a:fillRef idx="1">
+            <a:schemeClr val="accent1"/>
+          </a:fillRef>
+          <a:effectRef idx="0">
+            <a:schemeClr val="accent1"/>
+          </a:effectRef>
+          <a:fontRef idx="minor">
+            <a:schemeClr val="lt1"/>
+          </a:fontRef>
+        </p:style>
+        <p:txBody>
+          <a:bodyPr rtlCol="0" anchor="ctr"/>
+          <a:lstStyle/>
+          <a:p>
+            <a:pPr algn="ctr"/>
+            <a:r>
+              <a:rPr lang="en-US" dirty="0">
+                <a:solidFill>
+                  <a:schemeClr val="tx1"/>
+                </a:solidFill>
+              </a:rPr>
+              <a:t>Locality</a:t>
+            </a:r>
+          </a:p>
+          <a:p>
+            <a:pPr algn="ctr"/>
+            <a:r>
+              <a:rPr lang="en-US" sz="1400" dirty="0" err="1">
+                <a:solidFill>
+                  <a:schemeClr val="tx1"/>
+                </a:solidFill>
+              </a:rPr>
               <a:t>road_get_localities</a:t>
             </a:r>
             <a:r>
-              <a:rPr lang="en-US" dirty="0"/>
+              <a:rPr lang="en-US" sz="1400" dirty="0">
+                <a:solidFill>
+                  <a:schemeClr val="tx1"/>
+                </a:solidFill>
+              </a:rPr>
               <a:t>()</a:t>
             </a:r>
-            <a:endParaRPr lang="en-DE" dirty="0"/>
-          </a:p>
-        </p:txBody>
-      </p:sp>
-      <p:sp>
-        <p:nvSpPr>
-          <p:cNvPr id="7" name="Content Placeholder 6">
-            <a:extLst>
-              <a:ext uri="{FF2B5EF4-FFF2-40B4-BE49-F238E27FC236}">
-                <a16:creationId xmlns:a16="http://schemas.microsoft.com/office/drawing/2014/main" id="{C6B134FA-60BA-B52C-D29C-B29FD7C6FA95}"/>
-              </a:ext>
-            </a:extLst>
-          </p:cNvPr>
-          <p:cNvSpPr>
-            <a:spLocks noGrp="1"/>
-          </p:cNvSpPr>
-          <p:nvPr>
-            <p:ph idx="1"/>
-          </p:nvPr>
-        </p:nvSpPr>
-        <p:spPr/>
-        <p:txBody>
-          <a:bodyPr/>
+            <a:endParaRPr lang="en-DE" sz="1400" dirty="0">
+              <a:solidFill>
+                <a:schemeClr val="tx1"/>
+              </a:solidFill>
+            </a:endParaRPr>
+          </a:p>
+        </p:txBody>
+      </p:sp>
+      <p:sp>
+        <p:nvSpPr>
+          <p:cNvPr id="21" name="Rectangle 20">
+            <a:extLst>
+              <a:ext uri="{FF2B5EF4-FFF2-40B4-BE49-F238E27FC236}">
+                <a16:creationId xmlns:a16="http://schemas.microsoft.com/office/drawing/2014/main" id="{EFBCFCC0-4456-917A-95A1-4E2983AA057E}"/>
+              </a:ext>
+            </a:extLst>
+          </p:cNvPr>
+          <p:cNvSpPr/>
+          <p:nvPr/>
+        </p:nvSpPr>
+        <p:spPr>
+          <a:xfrm>
+            <a:off x="4747846" y="1957756"/>
+            <a:ext cx="2696308" cy="1078524"/>
+          </a:xfrm>
+          <a:prstGeom prst="rect">
+            <a:avLst/>
+          </a:prstGeom>
+          <a:solidFill>
+            <a:schemeClr val="bg1">
+              <a:lumMod val="95000"/>
+            </a:schemeClr>
+          </a:solidFill>
+        </p:spPr>
+        <p:style>
+          <a:lnRef idx="2">
+            <a:schemeClr val="accent1">
+              <a:shade val="15000"/>
+            </a:schemeClr>
+          </a:lnRef>
+          <a:fillRef idx="1">
+            <a:schemeClr val="accent1"/>
+          </a:fillRef>
+          <a:effectRef idx="0">
+            <a:schemeClr val="accent1"/>
+          </a:effectRef>
+          <a:fontRef idx="minor">
+            <a:schemeClr val="lt1"/>
+          </a:fontRef>
+        </p:style>
+        <p:txBody>
+          <a:bodyPr rtlCol="0" anchor="ctr"/>
           <a:lstStyle/>
           <a:p>
-            <a:endParaRPr lang="en-DE"/>
-          </a:p>
-        </p:txBody>
-      </p:sp>
+            <a:pPr algn="ctr"/>
+            <a:r>
+              <a:rPr lang="en-US" dirty="0">
+                <a:solidFill>
+                  <a:schemeClr val="tx1"/>
+                </a:solidFill>
+              </a:rPr>
+              <a:t>Assemblage</a:t>
+            </a:r>
+            <a:br>
+              <a:rPr lang="en-US" dirty="0">
+                <a:solidFill>
+                  <a:schemeClr val="tx1"/>
+                </a:solidFill>
+              </a:rPr>
+            </a:br>
+            <a:r>
+              <a:rPr lang="en-US" sz="1400" dirty="0" err="1">
+                <a:solidFill>
+                  <a:schemeClr val="tx1"/>
+                </a:solidFill>
+              </a:rPr>
+              <a:t>road_get_assemblages</a:t>
+            </a:r>
+            <a:r>
+              <a:rPr lang="en-US" sz="1400" dirty="0">
+                <a:solidFill>
+                  <a:schemeClr val="tx1"/>
+                </a:solidFill>
+              </a:rPr>
+              <a:t>()</a:t>
+            </a:r>
+            <a:endParaRPr lang="en-DE" dirty="0">
+              <a:solidFill>
+                <a:schemeClr val="tx1"/>
+              </a:solidFill>
+            </a:endParaRPr>
+          </a:p>
+        </p:txBody>
+      </p:sp>
+      <p:sp>
+        <p:nvSpPr>
+          <p:cNvPr id="22" name="Rectangle 21">
+            <a:extLst>
+              <a:ext uri="{FF2B5EF4-FFF2-40B4-BE49-F238E27FC236}">
+                <a16:creationId xmlns:a16="http://schemas.microsoft.com/office/drawing/2014/main" id="{E9655F6B-20A2-DF34-2745-5E9E5844377C}"/>
+              </a:ext>
+            </a:extLst>
+          </p:cNvPr>
+          <p:cNvSpPr/>
+          <p:nvPr/>
+        </p:nvSpPr>
+        <p:spPr>
+          <a:xfrm>
+            <a:off x="8657492" y="1957756"/>
+            <a:ext cx="2696308" cy="1078524"/>
+          </a:xfrm>
+          <a:prstGeom prst="rect">
+            <a:avLst/>
+          </a:prstGeom>
+          <a:solidFill>
+            <a:schemeClr val="bg1">
+              <a:lumMod val="95000"/>
+            </a:schemeClr>
+          </a:solidFill>
+        </p:spPr>
+        <p:style>
+          <a:lnRef idx="2">
+            <a:schemeClr val="accent1">
+              <a:shade val="15000"/>
+            </a:schemeClr>
+          </a:lnRef>
+          <a:fillRef idx="1">
+            <a:schemeClr val="accent1"/>
+          </a:fillRef>
+          <a:effectRef idx="0">
+            <a:schemeClr val="accent1"/>
+          </a:effectRef>
+          <a:fontRef idx="minor">
+            <a:schemeClr val="lt1"/>
+          </a:fontRef>
+        </p:style>
+        <p:txBody>
+          <a:bodyPr rtlCol="0" anchor="ctr"/>
+          <a:lstStyle/>
+          <a:p>
+            <a:pPr algn="ctr"/>
+            <a:r>
+              <a:rPr lang="en-US" dirty="0">
+                <a:solidFill>
+                  <a:schemeClr val="tx1"/>
+                </a:solidFill>
+              </a:rPr>
+              <a:t>Date</a:t>
+            </a:r>
+            <a:br>
+              <a:rPr lang="en-US" dirty="0">
+                <a:solidFill>
+                  <a:schemeClr val="tx1"/>
+                </a:solidFill>
+              </a:rPr>
+            </a:br>
+            <a:r>
+              <a:rPr lang="en-US" sz="1400" dirty="0" err="1">
+                <a:solidFill>
+                  <a:schemeClr val="tx1"/>
+                </a:solidFill>
+              </a:rPr>
+              <a:t>road_get_dates</a:t>
+            </a:r>
+            <a:r>
+              <a:rPr lang="en-US" sz="1400" dirty="0">
+                <a:solidFill>
+                  <a:schemeClr val="tx1"/>
+                </a:solidFill>
+              </a:rPr>
+              <a:t>()</a:t>
+            </a:r>
+            <a:endParaRPr lang="en-DE" dirty="0">
+              <a:solidFill>
+                <a:schemeClr val="tx1"/>
+              </a:solidFill>
+            </a:endParaRPr>
+          </a:p>
+        </p:txBody>
+      </p:sp>
+      <p:cxnSp>
+        <p:nvCxnSpPr>
+          <p:cNvPr id="23" name="Straight Arrow Connector 22">
+            <a:extLst>
+              <a:ext uri="{FF2B5EF4-FFF2-40B4-BE49-F238E27FC236}">
+                <a16:creationId xmlns:a16="http://schemas.microsoft.com/office/drawing/2014/main" id="{06433E44-58D6-A104-43BB-81EA911AF6E2}"/>
+              </a:ext>
+            </a:extLst>
+          </p:cNvPr>
+          <p:cNvCxnSpPr>
+            <a:stCxn id="20" idx="3"/>
+            <a:endCxn id="21" idx="1"/>
+          </p:cNvCxnSpPr>
+          <p:nvPr/>
+        </p:nvCxnSpPr>
+        <p:spPr>
+          <a:xfrm>
+            <a:off x="3534508" y="2497018"/>
+            <a:ext cx="1213338" cy="0"/>
+          </a:xfrm>
+          <a:prstGeom prst="straightConnector1">
+            <a:avLst/>
+          </a:prstGeom>
+          <a:ln>
+            <a:solidFill>
+              <a:schemeClr val="tx1"/>
+            </a:solidFill>
+            <a:tailEnd type="triangle"/>
+          </a:ln>
+        </p:spPr>
+        <p:style>
+          <a:lnRef idx="2">
+            <a:schemeClr val="accent1"/>
+          </a:lnRef>
+          <a:fillRef idx="0">
+            <a:schemeClr val="accent1"/>
+          </a:fillRef>
+          <a:effectRef idx="1">
+            <a:schemeClr val="accent1"/>
+          </a:effectRef>
+          <a:fontRef idx="minor">
+            <a:schemeClr val="tx1"/>
+          </a:fontRef>
+        </p:style>
+      </p:cxnSp>
+      <p:cxnSp>
+        <p:nvCxnSpPr>
+          <p:cNvPr id="24" name="Straight Arrow Connector 23">
+            <a:extLst>
+              <a:ext uri="{FF2B5EF4-FFF2-40B4-BE49-F238E27FC236}">
+                <a16:creationId xmlns:a16="http://schemas.microsoft.com/office/drawing/2014/main" id="{F498FF9C-0C06-6369-CBD9-1D196CF979C5}"/>
+              </a:ext>
+            </a:extLst>
+          </p:cNvPr>
+          <p:cNvCxnSpPr>
+            <a:cxnSpLocks/>
+            <a:stCxn id="21" idx="3"/>
+            <a:endCxn id="22" idx="1"/>
+          </p:cNvCxnSpPr>
+          <p:nvPr/>
+        </p:nvCxnSpPr>
+        <p:spPr>
+          <a:xfrm>
+            <a:off x="7444154" y="2497018"/>
+            <a:ext cx="1213338" cy="0"/>
+          </a:xfrm>
+          <a:prstGeom prst="straightConnector1">
+            <a:avLst/>
+          </a:prstGeom>
+          <a:ln>
+            <a:solidFill>
+              <a:schemeClr val="tx1"/>
+            </a:solidFill>
+            <a:tailEnd type="triangle"/>
+          </a:ln>
+        </p:spPr>
+        <p:style>
+          <a:lnRef idx="2">
+            <a:schemeClr val="accent1"/>
+          </a:lnRef>
+          <a:fillRef idx="0">
+            <a:schemeClr val="accent1"/>
+          </a:fillRef>
+          <a:effectRef idx="1">
+            <a:schemeClr val="accent1"/>
+          </a:effectRef>
+          <a:fontRef idx="minor">
+            <a:schemeClr val="tx1"/>
+          </a:fontRef>
+        </p:style>
+      </p:cxnSp>
       <p:pic>
         <p:nvPicPr>
-          <p:cNvPr id="9" name="Picture 8">
-            <a:extLst>
-              <a:ext uri="{FF2B5EF4-FFF2-40B4-BE49-F238E27FC236}">
-                <a16:creationId xmlns:a16="http://schemas.microsoft.com/office/drawing/2014/main" id="{A47F3AAE-C79F-2D3D-D0B3-DC148D632712}"/>
+          <p:cNvPr id="25" name="Graphic 24" descr="Layers Design with solid fill">
+            <a:extLst>
+              <a:ext uri="{FF2B5EF4-FFF2-40B4-BE49-F238E27FC236}">
+                <a16:creationId xmlns:a16="http://schemas.microsoft.com/office/drawing/2014/main" id="{3CD5F279-CD41-C119-6DB8-146CF32F56F1}"/>
               </a:ext>
             </a:extLst>
           </p:cNvPr>
@@ -3570,15 +4343,93 @@
           <p:nvPr/>
         </p:nvPicPr>
         <p:blipFill>
-          <a:blip r:embed="rId2"/>
+          <a:blip r:embed="rId2">
+            <a:extLst>
+              <a:ext uri="{96DAC541-7B7A-43D3-8B79-37D633B846F1}">
+                <asvg:svgBlip xmlns:asvg="http://schemas.microsoft.com/office/drawing/2016/SVG/main" r:embed="rId3"/>
+              </a:ext>
+            </a:extLst>
+          </a:blip>
           <a:stretch>
             <a:fillRect/>
           </a:stretch>
         </p:blipFill>
         <p:spPr>
           <a:xfrm>
-            <a:off x="2261652" y="2300844"/>
-            <a:ext cx="7668695" cy="3400900"/>
+            <a:off x="4965367" y="2149591"/>
+            <a:ext cx="432000" cy="432000"/>
+          </a:xfrm>
+          <a:prstGeom prst="rect">
+            <a:avLst/>
+          </a:prstGeom>
+        </p:spPr>
+      </p:pic>
+      <p:pic>
+        <p:nvPicPr>
+          <p:cNvPr id="26" name="Graphic 25" descr="Marker with solid fill">
+            <a:extLst>
+              <a:ext uri="{FF2B5EF4-FFF2-40B4-BE49-F238E27FC236}">
+                <a16:creationId xmlns:a16="http://schemas.microsoft.com/office/drawing/2014/main" id="{AE25D0F4-BDFE-30DF-DB34-9EBFD47536F5}"/>
+              </a:ext>
+            </a:extLst>
+          </p:cNvPr>
+          <p:cNvPicPr>
+            <a:picLocks noChangeAspect="1"/>
+          </p:cNvPicPr>
+          <p:nvPr/>
+        </p:nvPicPr>
+        <p:blipFill>
+          <a:blip r:embed="rId4">
+            <a:extLst>
+              <a:ext uri="{96DAC541-7B7A-43D3-8B79-37D633B846F1}">
+                <asvg:svgBlip xmlns:asvg="http://schemas.microsoft.com/office/drawing/2016/SVG/main" r:embed="rId5"/>
+              </a:ext>
+            </a:extLst>
+          </a:blip>
+          <a:stretch>
+            <a:fillRect/>
+          </a:stretch>
+        </p:blipFill>
+        <p:spPr>
+          <a:xfrm>
+            <a:off x="1396014" y="2149591"/>
+            <a:ext cx="432000" cy="432000"/>
+          </a:xfrm>
+          <a:prstGeom prst="rect">
+            <a:avLst/>
+          </a:prstGeom>
+        </p:spPr>
+      </p:pic>
+      <p:pic>
+        <p:nvPicPr>
+          <p:cNvPr id="27" name="Graphic 26" descr="Hourglass Finished with solid fill">
+            <a:extLst>
+              <a:ext uri="{FF2B5EF4-FFF2-40B4-BE49-F238E27FC236}">
+                <a16:creationId xmlns:a16="http://schemas.microsoft.com/office/drawing/2014/main" id="{A41E36FC-654B-BE48-6980-242377998D33}"/>
+              </a:ext>
+            </a:extLst>
+          </p:cNvPr>
+          <p:cNvPicPr>
+            <a:picLocks noChangeAspect="1"/>
+          </p:cNvPicPr>
+          <p:nvPr/>
+        </p:nvPicPr>
+        <p:blipFill>
+          <a:blip r:embed="rId6">
+            <a:extLst>
+              <a:ext uri="{96DAC541-7B7A-43D3-8B79-37D633B846F1}">
+                <asvg:svgBlip xmlns:asvg="http://schemas.microsoft.com/office/drawing/2016/SVG/main" r:embed="rId7"/>
+              </a:ext>
+            </a:extLst>
+          </a:blip>
+          <a:stretch>
+            <a:fillRect/>
+          </a:stretch>
+        </p:blipFill>
+        <p:spPr>
+          <a:xfrm>
+            <a:off x="9386133" y="2190344"/>
+            <a:ext cx="360000" cy="360000"/>
           </a:xfrm>
           <a:prstGeom prst="rect">
             <a:avLst/>
@@ -3588,7 +4439,7 @@
     </p:spTree>
     <p:extLst>
       <p:ext uri="{BB962C8B-B14F-4D97-AF65-F5344CB8AC3E}">
-        <p14:creationId xmlns:p14="http://schemas.microsoft.com/office/powerpoint/2010/main" val="3918839550"/>
+        <p14:creationId xmlns:p14="http://schemas.microsoft.com/office/powerpoint/2010/main" val="2974061982"/>
       </p:ext>
     </p:extLst>
   </p:cSld>
@@ -4159,7 +5010,7 @@
         <p:spPr/>
         <p:txBody>
           <a:bodyPr>
-            <a:normAutofit lnSpcReduction="10000"/>
+            <a:normAutofit/>
           </a:bodyPr>
           <a:lstStyle/>
           <a:p>
@@ -4167,97 +5018,103 @@
               <a:buNone/>
             </a:pPr>
             <a:r>
-              <a:rPr lang="en-US" dirty="0"/>
+              <a:rPr lang="en-US" sz="2400" dirty="0"/>
               <a:t>Requires: </a:t>
             </a:r>
           </a:p>
           <a:p>
             <a:r>
-              <a:rPr lang="en-US" dirty="0">
+              <a:rPr lang="en-US" sz="2400" dirty="0">
                 <a:latin typeface="Consolas" panose="020B0609020204030204" pitchFamily="49" charset="0"/>
               </a:rPr>
               <a:t>age</a:t>
             </a:r>
             <a:r>
-              <a:rPr lang="en-US" dirty="0"/>
+              <a:rPr lang="en-US" sz="2400" dirty="0"/>
               <a:t>, </a:t>
             </a:r>
             <a:r>
-              <a:rPr lang="en-US" dirty="0" err="1">
+              <a:rPr lang="en-US" sz="2400" dirty="0" err="1">
                 <a:latin typeface="Consolas" panose="020B0609020204030204" pitchFamily="49" charset="0"/>
               </a:rPr>
               <a:t>age_stdev_min</a:t>
             </a:r>
             <a:r>
-              <a:rPr lang="en-US" dirty="0">
+              <a:rPr lang="en-US" sz="2400" dirty="0">
                 <a:latin typeface="Consolas" panose="020B0609020204030204" pitchFamily="49" charset="0"/>
               </a:rPr>
               <a:t>, </a:t>
             </a:r>
             <a:r>
-              <a:rPr lang="en-US" dirty="0" err="1">
+              <a:rPr lang="en-US" sz="2400" dirty="0" err="1">
                 <a:latin typeface="Consolas" panose="020B0609020204030204" pitchFamily="49" charset="0"/>
               </a:rPr>
               <a:t>age_stdev_max</a:t>
             </a:r>
-            <a:endParaRPr lang="en-US" dirty="0">
+            <a:endParaRPr lang="en-US" sz="2400" dirty="0">
               <a:latin typeface="Consolas" panose="020B0609020204030204" pitchFamily="49" charset="0"/>
             </a:endParaRPr>
           </a:p>
           <a:p>
             <a:r>
-              <a:rPr lang="en-US" dirty="0" err="1">
+              <a:rPr lang="en-US" sz="2400" dirty="0" err="1">
                 <a:latin typeface="Consolas" panose="020B0609020204030204" pitchFamily="49" charset="0"/>
               </a:rPr>
               <a:t>dating_method</a:t>
             </a:r>
             <a:r>
-              <a:rPr lang="en-US" dirty="0"/>
+              <a:rPr lang="en-US" sz="2400" dirty="0"/>
               <a:t>, y, to perform dedicated age modelling (e.g. radiocarbon calibration)</a:t>
             </a:r>
           </a:p>
           <a:p>
             <a:r>
-              <a:rPr lang="en-US" dirty="0" err="1">
+              <a:rPr lang="en-US" sz="2400" dirty="0" err="1">
                 <a:latin typeface="Consolas" panose="020B0609020204030204" pitchFamily="49" charset="0"/>
               </a:rPr>
               <a:t>geolayer</a:t>
             </a:r>
             <a:r>
-              <a:rPr lang="en-US" dirty="0"/>
+              <a:rPr lang="en-US" sz="2400" dirty="0"/>
               <a:t> for </a:t>
             </a:r>
             <a:r>
-              <a:rPr lang="en-US" dirty="0" err="1"/>
+              <a:rPr lang="en-US" sz="2400" dirty="0" err="1"/>
               <a:t>bayesian</a:t>
             </a:r>
             <a:r>
-              <a:rPr lang="en-US" dirty="0"/>
+              <a:rPr lang="en-US" sz="2400" dirty="0"/>
               <a:t> modelling</a:t>
             </a:r>
           </a:p>
           <a:p>
             <a:r>
-              <a:rPr lang="en-US" dirty="0"/>
+              <a:rPr lang="en-US" sz="2400" dirty="0"/>
               <a:t>Important packages: </a:t>
             </a:r>
             <a:r>
-              <a:rPr lang="en-US" dirty="0" err="1">
+              <a:rPr lang="en-US" sz="2400" dirty="0" err="1">
                 <a:latin typeface="Consolas" panose="020B0609020204030204" pitchFamily="49" charset="0"/>
               </a:rPr>
               <a:t>rcarbon</a:t>
             </a:r>
             <a:r>
-              <a:rPr lang="en-US" dirty="0"/>
+              <a:rPr lang="en-US" sz="2400" dirty="0"/>
               <a:t>, </a:t>
             </a:r>
             <a:r>
-              <a:rPr lang="en-US" dirty="0" err="1">
+              <a:rPr lang="en-US" sz="2400" dirty="0" err="1">
                 <a:latin typeface="Consolas" panose="020B0609020204030204" pitchFamily="49" charset="0"/>
               </a:rPr>
               <a:t>archSeries</a:t>
             </a:r>
-            <a:endParaRPr lang="en-DE" dirty="0">
+            <a:r>
+              <a:rPr lang="en-US" sz="2400" dirty="0">
+                <a:latin typeface="Consolas" panose="020B0609020204030204" pitchFamily="49" charset="0"/>
+              </a:rPr>
+              <a:t>, etc.</a:t>
+            </a:r>
+            <a:endParaRPr lang="en-DE" sz="2400" dirty="0">
               <a:latin typeface="Consolas" panose="020B0609020204030204" pitchFamily="49" charset="0"/>
             </a:endParaRPr>
           </a:p>
@@ -7267,2203 +8124,6 @@
         <p:cNvPr id="1" name="">
           <a:extLst>
             <a:ext uri="{FF2B5EF4-FFF2-40B4-BE49-F238E27FC236}">
-              <a16:creationId xmlns:a16="http://schemas.microsoft.com/office/drawing/2014/main" id="{A5FE146E-7BAE-1678-07F6-F2A0637BA42C}"/>
-            </a:ext>
-          </a:extLst>
-        </p:cNvPr>
-        <p:cNvGrpSpPr/>
-        <p:nvPr/>
-      </p:nvGrpSpPr>
-      <p:grpSpPr>
-        <a:xfrm>
-          <a:off x="0" y="0"/>
-          <a:ext cx="0" cy="0"/>
-          <a:chOff x="0" y="0"/>
-          <a:chExt cx="0" cy="0"/>
-        </a:xfrm>
-      </p:grpSpPr>
-      <p:sp>
-        <p:nvSpPr>
-          <p:cNvPr id="2" name="Title 1">
-            <a:extLst>
-              <a:ext uri="{FF2B5EF4-FFF2-40B4-BE49-F238E27FC236}">
-                <a16:creationId xmlns:a16="http://schemas.microsoft.com/office/drawing/2014/main" id="{2627A322-1278-66BD-44A1-546430E4113C}"/>
-              </a:ext>
-            </a:extLst>
-          </p:cNvPr>
-          <p:cNvSpPr>
-            <a:spLocks noGrp="1"/>
-          </p:cNvSpPr>
-          <p:nvPr>
-            <p:ph type="title"/>
-          </p:nvPr>
-        </p:nvSpPr>
-        <p:spPr/>
-        <p:txBody>
-          <a:bodyPr/>
-          <a:lstStyle/>
-          <a:p>
-            <a:r>
-              <a:rPr lang="en-US" dirty="0"/>
-              <a:t>LOD-related outputs</a:t>
-            </a:r>
-            <a:endParaRPr lang="en-DE" dirty="0"/>
-          </a:p>
-        </p:txBody>
-      </p:sp>
-      <p:sp>
-        <p:nvSpPr>
-          <p:cNvPr id="8" name="Arrow: Right 7">
-            <a:extLst>
-              <a:ext uri="{FF2B5EF4-FFF2-40B4-BE49-F238E27FC236}">
-                <a16:creationId xmlns:a16="http://schemas.microsoft.com/office/drawing/2014/main" id="{F1FFE1F5-72F3-52E8-1818-531F9CEF83CD}"/>
-              </a:ext>
-            </a:extLst>
-          </p:cNvPr>
-          <p:cNvSpPr/>
-          <p:nvPr/>
-        </p:nvSpPr>
-        <p:spPr>
-          <a:xfrm>
-            <a:off x="838199" y="1301265"/>
-            <a:ext cx="10515599" cy="559803"/>
-          </a:xfrm>
-          <a:prstGeom prst="rightArrow">
-            <a:avLst/>
-          </a:prstGeom>
-          <a:solidFill>
-            <a:schemeClr val="bg1">
-              <a:lumMod val="95000"/>
-            </a:schemeClr>
-          </a:solidFill>
-          <a:ln>
-            <a:solidFill>
-              <a:schemeClr val="tx1"/>
-            </a:solidFill>
-          </a:ln>
-        </p:spPr>
-        <p:style>
-          <a:lnRef idx="2">
-            <a:schemeClr val="accent1">
-              <a:shade val="15000"/>
-            </a:schemeClr>
-          </a:lnRef>
-          <a:fillRef idx="1">
-            <a:schemeClr val="accent1"/>
-          </a:fillRef>
-          <a:effectRef idx="0">
-            <a:schemeClr val="accent1"/>
-          </a:effectRef>
-          <a:fontRef idx="minor">
-            <a:schemeClr val="lt1"/>
-          </a:fontRef>
-        </p:style>
-        <p:txBody>
-          <a:bodyPr rtlCol="0" anchor="ctr"/>
-          <a:lstStyle/>
-          <a:p>
-            <a:pPr algn="ctr"/>
-            <a:r>
-              <a:rPr lang="en-US" dirty="0">
-                <a:solidFill>
-                  <a:schemeClr val="tx1"/>
-                </a:solidFill>
-              </a:rPr>
-              <a:t>Inheritance of outputs with increasing Level of Detail</a:t>
-            </a:r>
-            <a:endParaRPr lang="en-DE" dirty="0">
-              <a:solidFill>
-                <a:schemeClr val="tx1"/>
-              </a:solidFill>
-            </a:endParaRPr>
-          </a:p>
-        </p:txBody>
-      </p:sp>
-      <p:sp>
-        <p:nvSpPr>
-          <p:cNvPr id="5" name="TextBox 4">
-            <a:extLst>
-              <a:ext uri="{FF2B5EF4-FFF2-40B4-BE49-F238E27FC236}">
-                <a16:creationId xmlns:a16="http://schemas.microsoft.com/office/drawing/2014/main" id="{2F4313BA-807C-928A-4277-FF1FE29A8420}"/>
-              </a:ext>
-            </a:extLst>
-          </p:cNvPr>
-          <p:cNvSpPr txBox="1"/>
-          <p:nvPr/>
-        </p:nvSpPr>
-        <p:spPr>
-          <a:xfrm>
-            <a:off x="838200" y="3429000"/>
-            <a:ext cx="2696308" cy="1061829"/>
-          </a:xfrm>
-          <a:prstGeom prst="rect">
-            <a:avLst/>
-          </a:prstGeom>
-          <a:noFill/>
-        </p:spPr>
-        <p:txBody>
-          <a:bodyPr wrap="square" rtlCol="0">
-            <a:spAutoFit/>
-          </a:bodyPr>
-          <a:lstStyle/>
-          <a:p>
-            <a:r>
-              <a:rPr lang="en-US" dirty="0"/>
-              <a:t>Columns:</a:t>
-            </a:r>
-          </a:p>
-          <a:p>
-            <a:r>
-              <a:rPr lang="en-US" sz="1500" dirty="0">
-                <a:solidFill>
-                  <a:schemeClr val="accent1"/>
-                </a:solidFill>
-              </a:rPr>
-              <a:t>locality</a:t>
-            </a:r>
-            <a:r>
-              <a:rPr lang="en-US" sz="1500" dirty="0"/>
-              <a:t>, </a:t>
-            </a:r>
-            <a:r>
-              <a:rPr lang="en-US" sz="1500" dirty="0">
-                <a:solidFill>
-                  <a:schemeClr val="accent1"/>
-                </a:solidFill>
-              </a:rPr>
-              <a:t>country</a:t>
-            </a:r>
-            <a:r>
-              <a:rPr lang="en-US" sz="1500" dirty="0"/>
-              <a:t>, </a:t>
-            </a:r>
-            <a:r>
-              <a:rPr lang="en-US" sz="1500" dirty="0">
-                <a:solidFill>
-                  <a:schemeClr val="accent1"/>
-                </a:solidFill>
-              </a:rPr>
-              <a:t>continent</a:t>
-            </a:r>
-            <a:r>
-              <a:rPr lang="en-US" sz="1500" dirty="0"/>
-              <a:t>, </a:t>
-            </a:r>
-            <a:r>
-              <a:rPr lang="en-US" sz="1500" dirty="0">
-                <a:solidFill>
-                  <a:schemeClr val="accent1"/>
-                </a:solidFill>
-              </a:rPr>
-              <a:t>subcontinent</a:t>
-            </a:r>
-            <a:r>
-              <a:rPr lang="en-US" sz="1500" dirty="0"/>
-              <a:t>, </a:t>
-            </a:r>
-            <a:r>
-              <a:rPr lang="en-US" sz="1500" dirty="0" err="1">
-                <a:solidFill>
-                  <a:schemeClr val="accent1"/>
-                </a:solidFill>
-              </a:rPr>
-              <a:t>locality_type</a:t>
-            </a:r>
-            <a:r>
-              <a:rPr lang="en-US" sz="1500" dirty="0"/>
-              <a:t>, </a:t>
-            </a:r>
-            <a:br>
-              <a:rPr lang="en-US" sz="1500" dirty="0"/>
-            </a:br>
-            <a:r>
-              <a:rPr lang="en-US" sz="1500" dirty="0">
-                <a:solidFill>
-                  <a:schemeClr val="accent6"/>
-                </a:solidFill>
-              </a:rPr>
-              <a:t>x</a:t>
-            </a:r>
-            <a:r>
-              <a:rPr lang="en-US" sz="1500" dirty="0"/>
-              <a:t>, </a:t>
-            </a:r>
-            <a:r>
-              <a:rPr lang="en-US" sz="1500" dirty="0">
-                <a:solidFill>
-                  <a:schemeClr val="accent6"/>
-                </a:solidFill>
-              </a:rPr>
-              <a:t>y</a:t>
-            </a:r>
-            <a:r>
-              <a:rPr lang="en-US" sz="1500" dirty="0"/>
-              <a:t>;</a:t>
-            </a:r>
-            <a:endParaRPr lang="en-DE" sz="1500" dirty="0"/>
-          </a:p>
-        </p:txBody>
-      </p:sp>
-      <p:sp>
-        <p:nvSpPr>
-          <p:cNvPr id="14" name="TextBox 13">
-            <a:extLst>
-              <a:ext uri="{FF2B5EF4-FFF2-40B4-BE49-F238E27FC236}">
-                <a16:creationId xmlns:a16="http://schemas.microsoft.com/office/drawing/2014/main" id="{0622A2CF-1027-8C3F-1195-7EC4CF0DAEAC}"/>
-              </a:ext>
-            </a:extLst>
-          </p:cNvPr>
-          <p:cNvSpPr txBox="1"/>
-          <p:nvPr/>
-        </p:nvSpPr>
-        <p:spPr>
-          <a:xfrm>
-            <a:off x="4747845" y="3429000"/>
-            <a:ext cx="2696308" cy="3370153"/>
-          </a:xfrm>
-          <a:prstGeom prst="rect">
-            <a:avLst/>
-          </a:prstGeom>
-          <a:noFill/>
-        </p:spPr>
-        <p:txBody>
-          <a:bodyPr wrap="square" rtlCol="0">
-            <a:spAutoFit/>
-          </a:bodyPr>
-          <a:lstStyle/>
-          <a:p>
-            <a:r>
-              <a:rPr lang="en-US" dirty="0"/>
-              <a:t>Columns:</a:t>
-            </a:r>
-          </a:p>
-          <a:p>
-            <a:r>
-              <a:rPr lang="en-US" sz="1500" i="1" dirty="0"/>
-              <a:t>All from locality plus</a:t>
-            </a:r>
-          </a:p>
-          <a:p>
-            <a:r>
-              <a:rPr lang="en-US" sz="1500" dirty="0" err="1">
-                <a:solidFill>
-                  <a:schemeClr val="accent1"/>
-                </a:solidFill>
-              </a:rPr>
-              <a:t>assemblage_name</a:t>
-            </a:r>
-            <a:r>
-              <a:rPr lang="en-US" sz="1500" dirty="0"/>
-              <a:t>, </a:t>
-            </a:r>
-            <a:r>
-              <a:rPr lang="en-US" sz="1500" dirty="0" err="1">
-                <a:solidFill>
-                  <a:schemeClr val="accent1"/>
-                </a:solidFill>
-              </a:rPr>
-              <a:t>assemblage_id</a:t>
-            </a:r>
-            <a:r>
-              <a:rPr lang="en-US" sz="1500" dirty="0"/>
-              <a:t>, </a:t>
-            </a:r>
-            <a:r>
-              <a:rPr lang="en-US" sz="1500" dirty="0">
-                <a:solidFill>
-                  <a:schemeClr val="accent2"/>
-                </a:solidFill>
-              </a:rPr>
-              <a:t>technology</a:t>
-            </a:r>
-            <a:r>
-              <a:rPr lang="en-US" sz="1500" dirty="0"/>
-              <a:t>, </a:t>
-            </a:r>
-            <a:r>
-              <a:rPr lang="en-US" sz="1500" dirty="0">
-                <a:solidFill>
-                  <a:schemeClr val="accent2"/>
-                </a:solidFill>
-              </a:rPr>
-              <a:t>typology</a:t>
-            </a:r>
-            <a:r>
-              <a:rPr lang="en-US" sz="1500" dirty="0"/>
-              <a:t>, </a:t>
-            </a:r>
-            <a:r>
-              <a:rPr lang="en-US" sz="1500" dirty="0" err="1">
-                <a:solidFill>
-                  <a:schemeClr val="accent2"/>
-                </a:solidFill>
-              </a:rPr>
-              <a:t>raw_material</a:t>
-            </a:r>
-            <a:r>
-              <a:rPr lang="en-US" sz="1500" dirty="0"/>
-              <a:t>, </a:t>
-            </a:r>
-            <a:r>
-              <a:rPr lang="en-US" sz="1500" dirty="0">
-                <a:solidFill>
-                  <a:schemeClr val="accent2"/>
-                </a:solidFill>
-              </a:rPr>
-              <a:t>function</a:t>
-            </a:r>
-            <a:r>
-              <a:rPr lang="en-US" sz="1500" dirty="0"/>
-              <a:t>, </a:t>
-            </a:r>
-            <a:r>
-              <a:rPr lang="en-US" sz="1500" dirty="0" err="1">
-                <a:solidFill>
-                  <a:schemeClr val="accent2"/>
-                </a:solidFill>
-              </a:rPr>
-              <a:t>miscelaneous_finds</a:t>
-            </a:r>
-            <a:r>
-              <a:rPr lang="en-US" sz="1500" dirty="0"/>
-              <a:t>, </a:t>
-            </a:r>
-            <a:r>
-              <a:rPr lang="en-US" sz="1500" dirty="0" err="1">
-                <a:solidFill>
-                  <a:schemeClr val="accent2"/>
-                </a:solidFill>
-              </a:rPr>
-              <a:t>organic_tools</a:t>
-            </a:r>
-            <a:r>
-              <a:rPr lang="en-US" sz="1500" dirty="0"/>
-              <a:t>, </a:t>
-            </a:r>
-            <a:r>
-              <a:rPr lang="en-US" sz="1500" dirty="0" err="1">
-                <a:solidFill>
-                  <a:schemeClr val="accent2"/>
-                </a:solidFill>
-              </a:rPr>
-              <a:t>symbolic_artifacts</a:t>
-            </a:r>
-            <a:r>
-              <a:rPr lang="en-US" sz="1500" dirty="0"/>
-              <a:t>, </a:t>
-            </a:r>
-            <a:r>
-              <a:rPr lang="en-US" sz="1500" dirty="0">
-                <a:solidFill>
-                  <a:schemeClr val="accent2"/>
-                </a:solidFill>
-              </a:rPr>
-              <a:t>feature</a:t>
-            </a:r>
-            <a:r>
-              <a:rPr lang="en-US" sz="1500" dirty="0"/>
-              <a:t>, </a:t>
-            </a:r>
-            <a:r>
-              <a:rPr lang="en-US" sz="1500" dirty="0" err="1">
-                <a:solidFill>
-                  <a:schemeClr val="accent2"/>
-                </a:solidFill>
-              </a:rPr>
-              <a:t>animal_remains</a:t>
-            </a:r>
-            <a:r>
-              <a:rPr lang="en-US" sz="1500" dirty="0"/>
-              <a:t>, </a:t>
-            </a:r>
-            <a:r>
-              <a:rPr lang="en-US" sz="1500" dirty="0">
-                <a:solidFill>
-                  <a:schemeClr val="accent2"/>
-                </a:solidFill>
-              </a:rPr>
-              <a:t>paleofauna</a:t>
-            </a:r>
-            <a:r>
-              <a:rPr lang="en-US" sz="1500" dirty="0"/>
-              <a:t>, </a:t>
-            </a:r>
-            <a:r>
-              <a:rPr lang="en-US" sz="1500" dirty="0" err="1">
-                <a:solidFill>
-                  <a:schemeClr val="accent2"/>
-                </a:solidFill>
-              </a:rPr>
-              <a:t>plant_remains</a:t>
-            </a:r>
-            <a:r>
-              <a:rPr lang="en-US" sz="1500" dirty="0"/>
-              <a:t>, </a:t>
-            </a:r>
-            <a:r>
-              <a:rPr lang="en-US" sz="1500" dirty="0" err="1">
-                <a:solidFill>
-                  <a:schemeClr val="accent2"/>
-                </a:solidFill>
-              </a:rPr>
-              <a:t>human_remains</a:t>
-            </a:r>
-            <a:r>
-              <a:rPr lang="en-US" sz="1500" dirty="0"/>
-              <a:t>, </a:t>
-            </a:r>
-            <a:r>
-              <a:rPr lang="en-US" sz="1500" dirty="0" err="1">
-                <a:solidFill>
-                  <a:schemeClr val="accent6"/>
-                </a:solidFill>
-              </a:rPr>
-              <a:t>synthesized_age_min</a:t>
-            </a:r>
-            <a:r>
-              <a:rPr lang="en-US" sz="1500" dirty="0"/>
-              <a:t>, </a:t>
-            </a:r>
-            <a:r>
-              <a:rPr lang="en-US" sz="1500" dirty="0" err="1">
-                <a:solidFill>
-                  <a:schemeClr val="accent6"/>
-                </a:solidFill>
-              </a:rPr>
-              <a:t>synthesized_age_max</a:t>
-            </a:r>
-            <a:r>
-              <a:rPr lang="en-US" sz="1500" dirty="0"/>
-              <a:t>, </a:t>
-            </a:r>
-            <a:r>
-              <a:rPr lang="en-US" sz="1500" dirty="0" err="1">
-                <a:solidFill>
-                  <a:schemeClr val="accent5"/>
-                </a:solidFill>
-              </a:rPr>
-              <a:t>geolayer</a:t>
-            </a:r>
-            <a:r>
-              <a:rPr lang="en-US" sz="1500" dirty="0">
-                <a:solidFill>
-                  <a:schemeClr val="accent5"/>
-                </a:solidFill>
-              </a:rPr>
-              <a:t>, </a:t>
-            </a:r>
-            <a:r>
-              <a:rPr lang="en-US" sz="1500" dirty="0" err="1">
-                <a:solidFill>
-                  <a:schemeClr val="accent5"/>
-                </a:solidFill>
-              </a:rPr>
-              <a:t>archaeoleayer</a:t>
-            </a:r>
-            <a:r>
-              <a:rPr lang="en-US" sz="1500" dirty="0">
-                <a:solidFill>
-                  <a:schemeClr val="accent5"/>
-                </a:solidFill>
-              </a:rPr>
-              <a:t>;</a:t>
-            </a:r>
-            <a:endParaRPr lang="en-DE" sz="1500" dirty="0"/>
-          </a:p>
-        </p:txBody>
-      </p:sp>
-      <p:sp>
-        <p:nvSpPr>
-          <p:cNvPr id="17" name="TextBox 16">
-            <a:extLst>
-              <a:ext uri="{FF2B5EF4-FFF2-40B4-BE49-F238E27FC236}">
-                <a16:creationId xmlns:a16="http://schemas.microsoft.com/office/drawing/2014/main" id="{60A127FC-71F0-46B2-1297-62F07F2D9823}"/>
-              </a:ext>
-            </a:extLst>
-          </p:cNvPr>
-          <p:cNvSpPr txBox="1"/>
-          <p:nvPr/>
-        </p:nvSpPr>
-        <p:spPr>
-          <a:xfrm>
-            <a:off x="8657490" y="3429000"/>
-            <a:ext cx="2696308" cy="2031325"/>
-          </a:xfrm>
-          <a:prstGeom prst="rect">
-            <a:avLst/>
-          </a:prstGeom>
-          <a:noFill/>
-        </p:spPr>
-        <p:txBody>
-          <a:bodyPr wrap="square" rtlCol="0">
-            <a:spAutoFit/>
-          </a:bodyPr>
-          <a:lstStyle/>
-          <a:p>
-            <a:r>
-              <a:rPr lang="en-US" dirty="0"/>
-              <a:t>Columns:</a:t>
-            </a:r>
-          </a:p>
-          <a:p>
-            <a:r>
-              <a:rPr lang="en-US" sz="1500" i="1" dirty="0"/>
-              <a:t>Some from assemblage plus</a:t>
-            </a:r>
-            <a:endParaRPr lang="en-US" sz="1500" dirty="0"/>
-          </a:p>
-          <a:p>
-            <a:r>
-              <a:rPr lang="en-US" sz="1500" dirty="0">
-                <a:solidFill>
-                  <a:schemeClr val="accent6"/>
-                </a:solidFill>
-              </a:rPr>
-              <a:t>age</a:t>
-            </a:r>
-            <a:r>
-              <a:rPr lang="en-US" sz="1500" dirty="0"/>
-              <a:t>, </a:t>
-            </a:r>
-            <a:r>
-              <a:rPr lang="en-US" sz="1500" dirty="0" err="1">
-                <a:solidFill>
-                  <a:schemeClr val="accent6"/>
-                </a:solidFill>
-              </a:rPr>
-              <a:t>age_stdev_plus</a:t>
-            </a:r>
-            <a:r>
-              <a:rPr lang="en-US" sz="1500" dirty="0"/>
-              <a:t>, </a:t>
-            </a:r>
-            <a:r>
-              <a:rPr lang="en-US" sz="1500" dirty="0" err="1">
-                <a:solidFill>
-                  <a:schemeClr val="accent6"/>
-                </a:solidFill>
-              </a:rPr>
-              <a:t>age_stdev_minus</a:t>
-            </a:r>
-            <a:r>
-              <a:rPr lang="en-US" sz="1500" dirty="0"/>
-              <a:t>, </a:t>
-            </a:r>
-            <a:r>
-              <a:rPr lang="en-US" sz="1500" dirty="0" err="1">
-                <a:solidFill>
-                  <a:schemeClr val="accent1"/>
-                </a:solidFill>
-              </a:rPr>
-              <a:t>dating_method</a:t>
-            </a:r>
-            <a:r>
-              <a:rPr lang="en-US" sz="1500" dirty="0"/>
-              <a:t>, </a:t>
-            </a:r>
-            <a:r>
-              <a:rPr lang="en-US" sz="1500" dirty="0">
-                <a:solidFill>
-                  <a:schemeClr val="accent1"/>
-                </a:solidFill>
-              </a:rPr>
-              <a:t>material</a:t>
-            </a:r>
-            <a:r>
-              <a:rPr lang="en-US" sz="1500" dirty="0"/>
-              <a:t>, </a:t>
-            </a:r>
-            <a:r>
-              <a:rPr lang="en-US" sz="1500" dirty="0" err="1">
-                <a:solidFill>
-                  <a:schemeClr val="accent1"/>
-                </a:solidFill>
-              </a:rPr>
-              <a:t>lab_number</a:t>
-            </a:r>
-            <a:r>
-              <a:rPr lang="en-US" sz="1500" dirty="0">
-                <a:solidFill>
-                  <a:schemeClr val="accent1"/>
-                </a:solidFill>
-              </a:rPr>
-              <a:t>, lab</a:t>
-            </a:r>
-            <a:r>
-              <a:rPr lang="en-US" sz="1500" dirty="0"/>
-              <a:t>, </a:t>
-            </a:r>
-            <a:r>
-              <a:rPr lang="en-US" sz="1500" dirty="0">
-                <a:solidFill>
-                  <a:schemeClr val="accent6"/>
-                </a:solidFill>
-              </a:rPr>
-              <a:t>y</a:t>
-            </a:r>
-            <a:r>
-              <a:rPr lang="en-US" sz="1500" dirty="0"/>
-              <a:t>, </a:t>
-            </a:r>
-            <a:r>
-              <a:rPr lang="en-US" sz="1500" dirty="0" err="1">
-                <a:solidFill>
-                  <a:schemeClr val="accent1"/>
-                </a:solidFill>
-              </a:rPr>
-              <a:t>geolayer</a:t>
-            </a:r>
-            <a:r>
-              <a:rPr lang="en-US" sz="1500" dirty="0">
-                <a:solidFill>
-                  <a:schemeClr val="accent1"/>
-                </a:solidFill>
-              </a:rPr>
-              <a:t>, </a:t>
-            </a:r>
-            <a:r>
-              <a:rPr lang="en-US" sz="1500" dirty="0" err="1">
-                <a:solidFill>
-                  <a:schemeClr val="accent1"/>
-                </a:solidFill>
-              </a:rPr>
-              <a:t>archaeolayer</a:t>
-            </a:r>
-            <a:r>
-              <a:rPr lang="en-US" sz="1500" dirty="0"/>
-              <a:t>;</a:t>
-            </a:r>
-          </a:p>
-          <a:p>
-            <a:endParaRPr lang="en-US" i="1" dirty="0"/>
-          </a:p>
-        </p:txBody>
-      </p:sp>
-      <p:sp>
-        <p:nvSpPr>
-          <p:cNvPr id="18" name="TextBox 17">
-            <a:extLst>
-              <a:ext uri="{FF2B5EF4-FFF2-40B4-BE49-F238E27FC236}">
-                <a16:creationId xmlns:a16="http://schemas.microsoft.com/office/drawing/2014/main" id="{6BD77C82-9715-EC46-7088-1789BE4D957A}"/>
-              </a:ext>
-            </a:extLst>
-          </p:cNvPr>
-          <p:cNvSpPr txBox="1"/>
-          <p:nvPr/>
-        </p:nvSpPr>
-        <p:spPr>
-          <a:xfrm>
-            <a:off x="0" y="5688449"/>
-            <a:ext cx="1429366" cy="1169551"/>
-          </a:xfrm>
-          <a:prstGeom prst="rect">
-            <a:avLst/>
-          </a:prstGeom>
-          <a:noFill/>
-          <a:ln>
-            <a:solidFill>
-              <a:schemeClr val="tx1"/>
-            </a:solidFill>
-            <a:prstDash val="dash"/>
-          </a:ln>
-        </p:spPr>
-        <p:txBody>
-          <a:bodyPr wrap="none" rtlCol="0">
-            <a:spAutoFit/>
-          </a:bodyPr>
-          <a:lstStyle/>
-          <a:p>
-            <a:r>
-              <a:rPr lang="en-US" sz="1400" dirty="0"/>
-              <a:t>Color key:</a:t>
-            </a:r>
-          </a:p>
-          <a:p>
-            <a:r>
-              <a:rPr lang="en-US" sz="1400" dirty="0">
-                <a:solidFill>
-                  <a:schemeClr val="accent1"/>
-                </a:solidFill>
-              </a:rPr>
-              <a:t>Character string</a:t>
-            </a:r>
-          </a:p>
-          <a:p>
-            <a:r>
-              <a:rPr lang="en-US" sz="1400" dirty="0">
-                <a:solidFill>
-                  <a:schemeClr val="accent6"/>
-                </a:solidFill>
-              </a:rPr>
-              <a:t>Numeric</a:t>
-            </a:r>
-          </a:p>
-          <a:p>
-            <a:r>
-              <a:rPr lang="en-US" sz="1400" dirty="0">
-                <a:solidFill>
-                  <a:schemeClr val="accent2"/>
-                </a:solidFill>
-              </a:rPr>
-              <a:t>Boolean</a:t>
-            </a:r>
-          </a:p>
-          <a:p>
-            <a:r>
-              <a:rPr lang="en-US" sz="1400" dirty="0">
-                <a:solidFill>
-                  <a:schemeClr val="accent5"/>
-                </a:solidFill>
-              </a:rPr>
-              <a:t>List</a:t>
-            </a:r>
-          </a:p>
-        </p:txBody>
-      </p:sp>
-      <p:sp>
-        <p:nvSpPr>
-          <p:cNvPr id="19" name="Rectangle 18">
-            <a:extLst>
-              <a:ext uri="{FF2B5EF4-FFF2-40B4-BE49-F238E27FC236}">
-                <a16:creationId xmlns:a16="http://schemas.microsoft.com/office/drawing/2014/main" id="{483C33BA-D3D5-1330-6B56-EF3816044774}"/>
-              </a:ext>
-            </a:extLst>
-          </p:cNvPr>
-          <p:cNvSpPr/>
-          <p:nvPr/>
-        </p:nvSpPr>
-        <p:spPr>
-          <a:xfrm>
-            <a:off x="838200" y="1957756"/>
-            <a:ext cx="2696308" cy="1078524"/>
-          </a:xfrm>
-          <a:prstGeom prst="rect">
-            <a:avLst/>
-          </a:prstGeom>
-          <a:solidFill>
-            <a:schemeClr val="bg1">
-              <a:lumMod val="95000"/>
-            </a:schemeClr>
-          </a:solidFill>
-        </p:spPr>
-        <p:style>
-          <a:lnRef idx="2">
-            <a:schemeClr val="accent1">
-              <a:shade val="15000"/>
-            </a:schemeClr>
-          </a:lnRef>
-          <a:fillRef idx="1">
-            <a:schemeClr val="accent1"/>
-          </a:fillRef>
-          <a:effectRef idx="0">
-            <a:schemeClr val="accent1"/>
-          </a:effectRef>
-          <a:fontRef idx="minor">
-            <a:schemeClr val="lt1"/>
-          </a:fontRef>
-        </p:style>
-        <p:txBody>
-          <a:bodyPr rtlCol="0" anchor="ctr"/>
-          <a:lstStyle/>
-          <a:p>
-            <a:pPr algn="ctr"/>
-            <a:r>
-              <a:rPr lang="en-US" dirty="0">
-                <a:solidFill>
-                  <a:schemeClr val="tx1"/>
-                </a:solidFill>
-              </a:rPr>
-              <a:t>Locality</a:t>
-            </a:r>
-          </a:p>
-          <a:p>
-            <a:pPr algn="ctr"/>
-            <a:r>
-              <a:rPr lang="en-US" sz="1400" dirty="0" err="1">
-                <a:solidFill>
-                  <a:schemeClr val="tx1"/>
-                </a:solidFill>
-              </a:rPr>
-              <a:t>road_get_localities</a:t>
-            </a:r>
-            <a:r>
-              <a:rPr lang="en-US" sz="1400" dirty="0">
-                <a:solidFill>
-                  <a:schemeClr val="tx1"/>
-                </a:solidFill>
-              </a:rPr>
-              <a:t>()</a:t>
-            </a:r>
-            <a:endParaRPr lang="en-DE" sz="1400" dirty="0">
-              <a:solidFill>
-                <a:schemeClr val="tx1"/>
-              </a:solidFill>
-            </a:endParaRPr>
-          </a:p>
-        </p:txBody>
-      </p:sp>
-      <p:sp>
-        <p:nvSpPr>
-          <p:cNvPr id="20" name="Rectangle 19">
-            <a:extLst>
-              <a:ext uri="{FF2B5EF4-FFF2-40B4-BE49-F238E27FC236}">
-                <a16:creationId xmlns:a16="http://schemas.microsoft.com/office/drawing/2014/main" id="{EB7C140D-A8BF-1B91-F6B4-182C760F749F}"/>
-              </a:ext>
-            </a:extLst>
-          </p:cNvPr>
-          <p:cNvSpPr/>
-          <p:nvPr/>
-        </p:nvSpPr>
-        <p:spPr>
-          <a:xfrm>
-            <a:off x="4747846" y="1957756"/>
-            <a:ext cx="2696308" cy="1078524"/>
-          </a:xfrm>
-          <a:prstGeom prst="rect">
-            <a:avLst/>
-          </a:prstGeom>
-          <a:solidFill>
-            <a:schemeClr val="bg1">
-              <a:lumMod val="95000"/>
-            </a:schemeClr>
-          </a:solidFill>
-        </p:spPr>
-        <p:style>
-          <a:lnRef idx="2">
-            <a:schemeClr val="accent1">
-              <a:shade val="15000"/>
-            </a:schemeClr>
-          </a:lnRef>
-          <a:fillRef idx="1">
-            <a:schemeClr val="accent1"/>
-          </a:fillRef>
-          <a:effectRef idx="0">
-            <a:schemeClr val="accent1"/>
-          </a:effectRef>
-          <a:fontRef idx="minor">
-            <a:schemeClr val="lt1"/>
-          </a:fontRef>
-        </p:style>
-        <p:txBody>
-          <a:bodyPr rtlCol="0" anchor="ctr"/>
-          <a:lstStyle/>
-          <a:p>
-            <a:pPr algn="ctr"/>
-            <a:r>
-              <a:rPr lang="en-US" dirty="0">
-                <a:solidFill>
-                  <a:schemeClr val="tx1"/>
-                </a:solidFill>
-              </a:rPr>
-              <a:t>Assemblage</a:t>
-            </a:r>
-            <a:br>
-              <a:rPr lang="en-US" dirty="0">
-                <a:solidFill>
-                  <a:schemeClr val="tx1"/>
-                </a:solidFill>
-              </a:rPr>
-            </a:br>
-            <a:r>
-              <a:rPr lang="en-US" sz="1400" dirty="0" err="1">
-                <a:solidFill>
-                  <a:schemeClr val="tx1"/>
-                </a:solidFill>
-              </a:rPr>
-              <a:t>road_get_assemblages</a:t>
-            </a:r>
-            <a:r>
-              <a:rPr lang="en-US" sz="1400" dirty="0">
-                <a:solidFill>
-                  <a:schemeClr val="tx1"/>
-                </a:solidFill>
-              </a:rPr>
-              <a:t>()</a:t>
-            </a:r>
-            <a:endParaRPr lang="en-DE" dirty="0">
-              <a:solidFill>
-                <a:schemeClr val="tx1"/>
-              </a:solidFill>
-            </a:endParaRPr>
-          </a:p>
-        </p:txBody>
-      </p:sp>
-      <p:sp>
-        <p:nvSpPr>
-          <p:cNvPr id="21" name="Rectangle 20">
-            <a:extLst>
-              <a:ext uri="{FF2B5EF4-FFF2-40B4-BE49-F238E27FC236}">
-                <a16:creationId xmlns:a16="http://schemas.microsoft.com/office/drawing/2014/main" id="{74245958-71B2-30EB-5CB6-138AC1491212}"/>
-              </a:ext>
-            </a:extLst>
-          </p:cNvPr>
-          <p:cNvSpPr/>
-          <p:nvPr/>
-        </p:nvSpPr>
-        <p:spPr>
-          <a:xfrm>
-            <a:off x="8657492" y="1957756"/>
-            <a:ext cx="2696308" cy="1078524"/>
-          </a:xfrm>
-          <a:prstGeom prst="rect">
-            <a:avLst/>
-          </a:prstGeom>
-          <a:solidFill>
-            <a:schemeClr val="bg1">
-              <a:lumMod val="95000"/>
-            </a:schemeClr>
-          </a:solidFill>
-        </p:spPr>
-        <p:style>
-          <a:lnRef idx="2">
-            <a:schemeClr val="accent1">
-              <a:shade val="15000"/>
-            </a:schemeClr>
-          </a:lnRef>
-          <a:fillRef idx="1">
-            <a:schemeClr val="accent1"/>
-          </a:fillRef>
-          <a:effectRef idx="0">
-            <a:schemeClr val="accent1"/>
-          </a:effectRef>
-          <a:fontRef idx="minor">
-            <a:schemeClr val="lt1"/>
-          </a:fontRef>
-        </p:style>
-        <p:txBody>
-          <a:bodyPr rtlCol="0" anchor="ctr"/>
-          <a:lstStyle/>
-          <a:p>
-            <a:pPr algn="ctr"/>
-            <a:r>
-              <a:rPr lang="en-US" dirty="0">
-                <a:solidFill>
-                  <a:schemeClr val="tx1"/>
-                </a:solidFill>
-              </a:rPr>
-              <a:t>Date</a:t>
-            </a:r>
-            <a:br>
-              <a:rPr lang="en-US" dirty="0">
-                <a:solidFill>
-                  <a:schemeClr val="tx1"/>
-                </a:solidFill>
-              </a:rPr>
-            </a:br>
-            <a:r>
-              <a:rPr lang="en-US" sz="1400" dirty="0" err="1">
-                <a:solidFill>
-                  <a:schemeClr val="tx1"/>
-                </a:solidFill>
-              </a:rPr>
-              <a:t>road_get_dates</a:t>
-            </a:r>
-            <a:r>
-              <a:rPr lang="en-US" sz="1400" dirty="0">
-                <a:solidFill>
-                  <a:schemeClr val="tx1"/>
-                </a:solidFill>
-              </a:rPr>
-              <a:t>()</a:t>
-            </a:r>
-            <a:endParaRPr lang="en-DE" dirty="0">
-              <a:solidFill>
-                <a:schemeClr val="tx1"/>
-              </a:solidFill>
-            </a:endParaRPr>
-          </a:p>
-        </p:txBody>
-      </p:sp>
-      <p:cxnSp>
-        <p:nvCxnSpPr>
-          <p:cNvPr id="22" name="Straight Arrow Connector 21">
-            <a:extLst>
-              <a:ext uri="{FF2B5EF4-FFF2-40B4-BE49-F238E27FC236}">
-                <a16:creationId xmlns:a16="http://schemas.microsoft.com/office/drawing/2014/main" id="{1EF299C4-1F55-93C3-E792-A7DF7F528E94}"/>
-              </a:ext>
-            </a:extLst>
-          </p:cNvPr>
-          <p:cNvCxnSpPr>
-            <a:cxnSpLocks/>
-            <a:stCxn id="19" idx="3"/>
-            <a:endCxn id="20" idx="1"/>
-          </p:cNvCxnSpPr>
-          <p:nvPr/>
-        </p:nvCxnSpPr>
-        <p:spPr>
-          <a:xfrm>
-            <a:off x="3534508" y="2497018"/>
-            <a:ext cx="1213338" cy="0"/>
-          </a:xfrm>
-          <a:prstGeom prst="straightConnector1">
-            <a:avLst/>
-          </a:prstGeom>
-          <a:ln>
-            <a:solidFill>
-              <a:schemeClr val="tx1"/>
-            </a:solidFill>
-            <a:tailEnd type="triangle"/>
-          </a:ln>
-        </p:spPr>
-        <p:style>
-          <a:lnRef idx="2">
-            <a:schemeClr val="accent1"/>
-          </a:lnRef>
-          <a:fillRef idx="0">
-            <a:schemeClr val="accent1"/>
-          </a:fillRef>
-          <a:effectRef idx="1">
-            <a:schemeClr val="accent1"/>
-          </a:effectRef>
-          <a:fontRef idx="minor">
-            <a:schemeClr val="tx1"/>
-          </a:fontRef>
-        </p:style>
-      </p:cxnSp>
-      <p:cxnSp>
-        <p:nvCxnSpPr>
-          <p:cNvPr id="23" name="Straight Arrow Connector 22">
-            <a:extLst>
-              <a:ext uri="{FF2B5EF4-FFF2-40B4-BE49-F238E27FC236}">
-                <a16:creationId xmlns:a16="http://schemas.microsoft.com/office/drawing/2014/main" id="{727A024E-ECFE-A086-7D2F-644ECA0B6231}"/>
-              </a:ext>
-            </a:extLst>
-          </p:cNvPr>
-          <p:cNvCxnSpPr>
-            <a:cxnSpLocks/>
-            <a:stCxn id="20" idx="3"/>
-            <a:endCxn id="21" idx="1"/>
-          </p:cNvCxnSpPr>
-          <p:nvPr/>
-        </p:nvCxnSpPr>
-        <p:spPr>
-          <a:xfrm>
-            <a:off x="7444154" y="2497018"/>
-            <a:ext cx="1213338" cy="0"/>
-          </a:xfrm>
-          <a:prstGeom prst="straightConnector1">
-            <a:avLst/>
-          </a:prstGeom>
-          <a:ln>
-            <a:solidFill>
-              <a:schemeClr val="tx1"/>
-            </a:solidFill>
-            <a:tailEnd type="triangle"/>
-          </a:ln>
-        </p:spPr>
-        <p:style>
-          <a:lnRef idx="2">
-            <a:schemeClr val="accent1"/>
-          </a:lnRef>
-          <a:fillRef idx="0">
-            <a:schemeClr val="accent1"/>
-          </a:fillRef>
-          <a:effectRef idx="1">
-            <a:schemeClr val="accent1"/>
-          </a:effectRef>
-          <a:fontRef idx="minor">
-            <a:schemeClr val="tx1"/>
-          </a:fontRef>
-        </p:style>
-      </p:cxnSp>
-      <p:pic>
-        <p:nvPicPr>
-          <p:cNvPr id="24" name="Graphic 23" descr="Layers Design with solid fill">
-            <a:extLst>
-              <a:ext uri="{FF2B5EF4-FFF2-40B4-BE49-F238E27FC236}">
-                <a16:creationId xmlns:a16="http://schemas.microsoft.com/office/drawing/2014/main" id="{93790E32-2DEB-4E17-1BF8-7D345255F412}"/>
-              </a:ext>
-            </a:extLst>
-          </p:cNvPr>
-          <p:cNvPicPr>
-            <a:picLocks noChangeAspect="1"/>
-          </p:cNvPicPr>
-          <p:nvPr/>
-        </p:nvPicPr>
-        <p:blipFill>
-          <a:blip r:embed="rId2">
-            <a:extLst>
-              <a:ext uri="{96DAC541-7B7A-43D3-8B79-37D633B846F1}">
-                <asvg:svgBlip xmlns:asvg="http://schemas.microsoft.com/office/drawing/2016/SVG/main" r:embed="rId3"/>
-              </a:ext>
-            </a:extLst>
-          </a:blip>
-          <a:stretch>
-            <a:fillRect/>
-          </a:stretch>
-        </p:blipFill>
-        <p:spPr>
-          <a:xfrm>
-            <a:off x="4965367" y="2149591"/>
-            <a:ext cx="432000" cy="432000"/>
-          </a:xfrm>
-          <a:prstGeom prst="rect">
-            <a:avLst/>
-          </a:prstGeom>
-        </p:spPr>
-      </p:pic>
-      <p:pic>
-        <p:nvPicPr>
-          <p:cNvPr id="25" name="Graphic 24" descr="Marker with solid fill">
-            <a:extLst>
-              <a:ext uri="{FF2B5EF4-FFF2-40B4-BE49-F238E27FC236}">
-                <a16:creationId xmlns:a16="http://schemas.microsoft.com/office/drawing/2014/main" id="{C8123CBC-3550-E2DB-4728-E8D00091D3F4}"/>
-              </a:ext>
-            </a:extLst>
-          </p:cNvPr>
-          <p:cNvPicPr>
-            <a:picLocks noChangeAspect="1"/>
-          </p:cNvPicPr>
-          <p:nvPr/>
-        </p:nvPicPr>
-        <p:blipFill>
-          <a:blip r:embed="rId4">
-            <a:extLst>
-              <a:ext uri="{96DAC541-7B7A-43D3-8B79-37D633B846F1}">
-                <asvg:svgBlip xmlns:asvg="http://schemas.microsoft.com/office/drawing/2016/SVG/main" r:embed="rId5"/>
-              </a:ext>
-            </a:extLst>
-          </a:blip>
-          <a:stretch>
-            <a:fillRect/>
-          </a:stretch>
-        </p:blipFill>
-        <p:spPr>
-          <a:xfrm>
-            <a:off x="1396014" y="2149591"/>
-            <a:ext cx="432000" cy="432000"/>
-          </a:xfrm>
-          <a:prstGeom prst="rect">
-            <a:avLst/>
-          </a:prstGeom>
-        </p:spPr>
-      </p:pic>
-      <p:pic>
-        <p:nvPicPr>
-          <p:cNvPr id="26" name="Graphic 25" descr="Hourglass Finished with solid fill">
-            <a:extLst>
-              <a:ext uri="{FF2B5EF4-FFF2-40B4-BE49-F238E27FC236}">
-                <a16:creationId xmlns:a16="http://schemas.microsoft.com/office/drawing/2014/main" id="{B70D7F0F-72E3-E442-F5A6-8362C556D6E9}"/>
-              </a:ext>
-            </a:extLst>
-          </p:cNvPr>
-          <p:cNvPicPr>
-            <a:picLocks noChangeAspect="1"/>
-          </p:cNvPicPr>
-          <p:nvPr/>
-        </p:nvPicPr>
-        <p:blipFill>
-          <a:blip r:embed="rId6">
-            <a:extLst>
-              <a:ext uri="{96DAC541-7B7A-43D3-8B79-37D633B846F1}">
-                <asvg:svgBlip xmlns:asvg="http://schemas.microsoft.com/office/drawing/2016/SVG/main" r:embed="rId7"/>
-              </a:ext>
-            </a:extLst>
-          </a:blip>
-          <a:stretch>
-            <a:fillRect/>
-          </a:stretch>
-        </p:blipFill>
-        <p:spPr>
-          <a:xfrm>
-            <a:off x="9386133" y="2190344"/>
-            <a:ext cx="360000" cy="360000"/>
-          </a:xfrm>
-          <a:prstGeom prst="rect">
-            <a:avLst/>
-          </a:prstGeom>
-        </p:spPr>
-      </p:pic>
-    </p:spTree>
-    <p:extLst>
-      <p:ext uri="{BB962C8B-B14F-4D97-AF65-F5344CB8AC3E}">
-        <p14:creationId xmlns:p14="http://schemas.microsoft.com/office/powerpoint/2010/main" val="3099776161"/>
-      </p:ext>
-    </p:extLst>
-  </p:cSld>
-  <p:clrMapOvr>
-    <a:masterClrMapping/>
-  </p:clrMapOvr>
-</p:sld>
-</file>
-
-<file path=ppt/slides/slide7.xml><?xml version="1.0" encoding="utf-8"?>
-<p:sld xmlns:a="http://schemas.openxmlformats.org/drawingml/2006/main" xmlns:r="http://schemas.openxmlformats.org/officeDocument/2006/relationships" xmlns:p="http://schemas.openxmlformats.org/presentationml/2006/main">
-  <p:cSld>
-    <p:spTree>
-      <p:nvGrpSpPr>
-        <p:cNvPr id="1" name="">
-          <a:extLst>
-            <a:ext uri="{FF2B5EF4-FFF2-40B4-BE49-F238E27FC236}">
-              <a16:creationId xmlns:a16="http://schemas.microsoft.com/office/drawing/2014/main" id="{4817A581-C4E7-D5E0-5D83-999057C9672E}"/>
-            </a:ext>
-          </a:extLst>
-        </p:cNvPr>
-        <p:cNvGrpSpPr/>
-        <p:nvPr/>
-      </p:nvGrpSpPr>
-      <p:grpSpPr>
-        <a:xfrm>
-          <a:off x="0" y="0"/>
-          <a:ext cx="0" cy="0"/>
-          <a:chOff x="0" y="0"/>
-          <a:chExt cx="0" cy="0"/>
-        </a:xfrm>
-      </p:grpSpPr>
-      <p:sp>
-        <p:nvSpPr>
-          <p:cNvPr id="2" name="Title 1">
-            <a:extLst>
-              <a:ext uri="{FF2B5EF4-FFF2-40B4-BE49-F238E27FC236}">
-                <a16:creationId xmlns:a16="http://schemas.microsoft.com/office/drawing/2014/main" id="{0EB557D1-4688-4F90-CF24-2EFE8B7CD674}"/>
-              </a:ext>
-            </a:extLst>
-          </p:cNvPr>
-          <p:cNvSpPr>
-            <a:spLocks noGrp="1"/>
-          </p:cNvSpPr>
-          <p:nvPr>
-            <p:ph type="title"/>
-          </p:nvPr>
-        </p:nvSpPr>
-        <p:spPr/>
-        <p:txBody>
-          <a:bodyPr/>
-          <a:lstStyle/>
-          <a:p>
-            <a:r>
-              <a:rPr lang="en-US" dirty="0"/>
-              <a:t>LOD-related arguments</a:t>
-            </a:r>
-            <a:endParaRPr lang="en-DE" dirty="0"/>
-          </a:p>
-        </p:txBody>
-      </p:sp>
-      <p:sp>
-        <p:nvSpPr>
-          <p:cNvPr id="8" name="Arrow: Left-Right 7">
-            <a:extLst>
-              <a:ext uri="{FF2B5EF4-FFF2-40B4-BE49-F238E27FC236}">
-                <a16:creationId xmlns:a16="http://schemas.microsoft.com/office/drawing/2014/main" id="{F60BACAC-6312-7E99-09DE-D68EAC174191}"/>
-              </a:ext>
-            </a:extLst>
-          </p:cNvPr>
-          <p:cNvSpPr/>
-          <p:nvPr/>
-        </p:nvSpPr>
-        <p:spPr>
-          <a:xfrm>
-            <a:off x="838199" y="1301265"/>
-            <a:ext cx="10515599" cy="559803"/>
-          </a:xfrm>
-          <a:prstGeom prst="leftRightArrow">
-            <a:avLst/>
-          </a:prstGeom>
-          <a:solidFill>
-            <a:schemeClr val="bg1">
-              <a:lumMod val="95000"/>
-            </a:schemeClr>
-          </a:solidFill>
-          <a:ln>
-            <a:solidFill>
-              <a:schemeClr val="tx1"/>
-            </a:solidFill>
-          </a:ln>
-        </p:spPr>
-        <p:style>
-          <a:lnRef idx="2">
-            <a:schemeClr val="accent1">
-              <a:shade val="15000"/>
-            </a:schemeClr>
-          </a:lnRef>
-          <a:fillRef idx="1">
-            <a:schemeClr val="accent1"/>
-          </a:fillRef>
-          <a:effectRef idx="0">
-            <a:schemeClr val="accent1"/>
-          </a:effectRef>
-          <a:fontRef idx="minor">
-            <a:schemeClr val="lt1"/>
-          </a:fontRef>
-        </p:style>
-        <p:txBody>
-          <a:bodyPr rtlCol="0" anchor="ctr"/>
-          <a:lstStyle/>
-          <a:p>
-            <a:pPr algn="ctr"/>
-            <a:r>
-              <a:rPr lang="en-US" dirty="0">
-                <a:solidFill>
-                  <a:schemeClr val="tx1"/>
-                </a:solidFill>
-              </a:rPr>
-              <a:t>Inheritance of arguments across all Levels Of Detail</a:t>
-            </a:r>
-            <a:endParaRPr lang="en-DE" dirty="0">
-              <a:solidFill>
-                <a:schemeClr val="tx1"/>
-              </a:solidFill>
-            </a:endParaRPr>
-          </a:p>
-        </p:txBody>
-      </p:sp>
-      <p:sp>
-        <p:nvSpPr>
-          <p:cNvPr id="5" name="TextBox 4">
-            <a:extLst>
-              <a:ext uri="{FF2B5EF4-FFF2-40B4-BE49-F238E27FC236}">
-                <a16:creationId xmlns:a16="http://schemas.microsoft.com/office/drawing/2014/main" id="{69200804-C828-E420-5EDC-46A30AB681B5}"/>
-              </a:ext>
-            </a:extLst>
-          </p:cNvPr>
-          <p:cNvSpPr txBox="1"/>
-          <p:nvPr/>
-        </p:nvSpPr>
-        <p:spPr>
-          <a:xfrm>
-            <a:off x="838200" y="3429000"/>
-            <a:ext cx="10515598" cy="1200329"/>
-          </a:xfrm>
-          <a:prstGeom prst="rect">
-            <a:avLst/>
-          </a:prstGeom>
-          <a:noFill/>
-        </p:spPr>
-        <p:txBody>
-          <a:bodyPr wrap="square" rtlCol="0">
-            <a:spAutoFit/>
-          </a:bodyPr>
-          <a:lstStyle/>
-          <a:p>
-            <a:r>
-              <a:rPr lang="en-US" dirty="0"/>
-              <a:t>Arguments:</a:t>
-            </a:r>
-          </a:p>
-          <a:p>
-            <a:r>
-              <a:rPr lang="en-US" dirty="0">
-                <a:solidFill>
-                  <a:schemeClr val="accent5"/>
-                </a:solidFill>
-              </a:rPr>
-              <a:t>locality</a:t>
-            </a:r>
-            <a:r>
-              <a:rPr lang="en-US" dirty="0"/>
-              <a:t>, </a:t>
-            </a:r>
-            <a:r>
-              <a:rPr lang="en-US" dirty="0">
-                <a:solidFill>
-                  <a:schemeClr val="accent5"/>
-                </a:solidFill>
-              </a:rPr>
-              <a:t>country</a:t>
-            </a:r>
-            <a:r>
-              <a:rPr lang="en-US" dirty="0"/>
-              <a:t>, </a:t>
-            </a:r>
-            <a:r>
-              <a:rPr lang="en-US" dirty="0">
-                <a:solidFill>
-                  <a:schemeClr val="accent5"/>
-                </a:solidFill>
-              </a:rPr>
-              <a:t>continent</a:t>
-            </a:r>
-            <a:r>
-              <a:rPr lang="en-US" dirty="0"/>
-              <a:t>, </a:t>
-            </a:r>
-            <a:r>
-              <a:rPr lang="en-US" dirty="0">
-                <a:solidFill>
-                  <a:schemeClr val="accent5"/>
-                </a:solidFill>
-              </a:rPr>
-              <a:t>subcontinent</a:t>
-            </a:r>
-            <a:r>
-              <a:rPr lang="en-US" dirty="0"/>
-              <a:t>, </a:t>
-            </a:r>
-            <a:r>
-              <a:rPr lang="en-US" dirty="0" err="1">
-                <a:solidFill>
-                  <a:schemeClr val="accent5"/>
-                </a:solidFill>
-              </a:rPr>
-              <a:t>locality_type</a:t>
-            </a:r>
-            <a:r>
-              <a:rPr lang="en-US" dirty="0"/>
-              <a:t>, </a:t>
-            </a:r>
-            <a:r>
-              <a:rPr lang="en-US" sz="1800" dirty="0" err="1">
-                <a:solidFill>
-                  <a:schemeClr val="accent5"/>
-                </a:solidFill>
-              </a:rPr>
-              <a:t>assemblage_name</a:t>
-            </a:r>
-            <a:r>
-              <a:rPr lang="en-US" sz="1800" dirty="0"/>
-              <a:t>, </a:t>
-            </a:r>
-            <a:r>
-              <a:rPr lang="en-US" sz="1800" dirty="0" err="1">
-                <a:solidFill>
-                  <a:schemeClr val="accent5"/>
-                </a:solidFill>
-              </a:rPr>
-              <a:t>assemblage_id</a:t>
-            </a:r>
-            <a:r>
-              <a:rPr lang="en-US" sz="1800" dirty="0"/>
-              <a:t>, </a:t>
-            </a:r>
-            <a:r>
-              <a:rPr lang="en-US" sz="1800" dirty="0">
-                <a:solidFill>
-                  <a:schemeClr val="accent5"/>
-                </a:solidFill>
-              </a:rPr>
-              <a:t>culture</a:t>
-            </a:r>
-            <a:r>
-              <a:rPr lang="en-US" sz="1800" dirty="0"/>
-              <a:t>, </a:t>
-            </a:r>
-            <a:r>
-              <a:rPr lang="en-US" sz="1800" dirty="0" err="1">
-                <a:solidFill>
-                  <a:schemeClr val="accent5"/>
-                </a:solidFill>
-              </a:rPr>
-              <a:t>cultural_period</a:t>
-            </a:r>
-            <a:r>
-              <a:rPr lang="en-US" sz="1800" dirty="0"/>
-              <a:t>, </a:t>
-            </a:r>
-            <a:r>
-              <a:rPr lang="en-US" sz="1800" dirty="0">
-                <a:solidFill>
-                  <a:schemeClr val="accent5"/>
-                </a:solidFill>
-              </a:rPr>
-              <a:t>technology</a:t>
-            </a:r>
-            <a:r>
-              <a:rPr lang="en-US" sz="1800" dirty="0"/>
-              <a:t>, </a:t>
-            </a:r>
-            <a:r>
-              <a:rPr lang="en-US" sz="1800" dirty="0">
-                <a:solidFill>
-                  <a:schemeClr val="accent5"/>
-                </a:solidFill>
-              </a:rPr>
-              <a:t>typology</a:t>
-            </a:r>
-            <a:r>
-              <a:rPr lang="en-US" sz="1800" dirty="0"/>
-              <a:t>, </a:t>
-            </a:r>
-            <a:r>
-              <a:rPr lang="en-US" sz="1800" dirty="0" err="1">
-                <a:solidFill>
-                  <a:schemeClr val="accent5"/>
-                </a:solidFill>
-              </a:rPr>
-              <a:t>raw_material</a:t>
-            </a:r>
-            <a:r>
-              <a:rPr lang="en-US" sz="1800" dirty="0"/>
-              <a:t>, </a:t>
-            </a:r>
-            <a:r>
-              <a:rPr lang="en-US" sz="1800" dirty="0">
-                <a:solidFill>
-                  <a:schemeClr val="accent5"/>
-                </a:solidFill>
-              </a:rPr>
-              <a:t>function</a:t>
-            </a:r>
-            <a:r>
-              <a:rPr lang="en-US" sz="1800" dirty="0"/>
-              <a:t>, </a:t>
-            </a:r>
-            <a:r>
-              <a:rPr lang="en-US" sz="1800" dirty="0" err="1">
-                <a:solidFill>
-                  <a:schemeClr val="accent5"/>
-                </a:solidFill>
-              </a:rPr>
-              <a:t>miscalaneous_finds</a:t>
-            </a:r>
-            <a:r>
-              <a:rPr lang="en-US" sz="1800" dirty="0"/>
-              <a:t>, </a:t>
-            </a:r>
-            <a:r>
-              <a:rPr lang="en-US" sz="1800" dirty="0" err="1">
-                <a:solidFill>
-                  <a:schemeClr val="accent5"/>
-                </a:solidFill>
-              </a:rPr>
-              <a:t>organic_tools</a:t>
-            </a:r>
-            <a:r>
-              <a:rPr lang="en-US" sz="1800" dirty="0"/>
-              <a:t>, </a:t>
-            </a:r>
-            <a:r>
-              <a:rPr lang="en-US" sz="1800" dirty="0" err="1">
-                <a:solidFill>
-                  <a:schemeClr val="accent5"/>
-                </a:solidFill>
-              </a:rPr>
-              <a:t>symbolic_artifacts</a:t>
-            </a:r>
-            <a:r>
-              <a:rPr lang="en-US" sz="1800" dirty="0"/>
-              <a:t>, </a:t>
-            </a:r>
-            <a:r>
-              <a:rPr lang="en-US" sz="1800" dirty="0">
-                <a:solidFill>
-                  <a:schemeClr val="accent5"/>
-                </a:solidFill>
-              </a:rPr>
-              <a:t>feature</a:t>
-            </a:r>
-            <a:r>
-              <a:rPr lang="en-US" sz="1800" dirty="0"/>
-              <a:t>, </a:t>
-            </a:r>
-            <a:r>
-              <a:rPr lang="en-US" sz="1800" dirty="0" err="1">
-                <a:solidFill>
-                  <a:schemeClr val="accent5"/>
-                </a:solidFill>
-              </a:rPr>
-              <a:t>animal_remains</a:t>
-            </a:r>
-            <a:r>
-              <a:rPr lang="en-US" sz="1800" dirty="0"/>
-              <a:t>, </a:t>
-            </a:r>
-            <a:r>
-              <a:rPr lang="en-US" sz="1800" dirty="0" err="1">
-                <a:solidFill>
-                  <a:schemeClr val="accent5"/>
-                </a:solidFill>
-              </a:rPr>
-              <a:t>plant_remains</a:t>
-            </a:r>
-            <a:r>
-              <a:rPr lang="en-US" sz="1800" dirty="0"/>
-              <a:t>, </a:t>
-            </a:r>
-            <a:r>
-              <a:rPr lang="en-US" sz="1800" dirty="0" err="1">
-                <a:solidFill>
-                  <a:schemeClr val="accent5"/>
-                </a:solidFill>
-              </a:rPr>
-              <a:t>geolayer</a:t>
-            </a:r>
-            <a:r>
-              <a:rPr lang="en-US" sz="1800" dirty="0"/>
-              <a:t>, </a:t>
-            </a:r>
-            <a:r>
-              <a:rPr lang="en-US" sz="1800" dirty="0" err="1">
-                <a:solidFill>
-                  <a:schemeClr val="accent6"/>
-                </a:solidFill>
-              </a:rPr>
-              <a:t>age_min</a:t>
-            </a:r>
-            <a:r>
-              <a:rPr lang="en-US" sz="1800" dirty="0"/>
-              <a:t>, </a:t>
-            </a:r>
-            <a:r>
-              <a:rPr lang="en-US" sz="1800" dirty="0" err="1">
-                <a:solidFill>
-                  <a:schemeClr val="accent6"/>
-                </a:solidFill>
-              </a:rPr>
-              <a:t>age_max</a:t>
-            </a:r>
-            <a:r>
-              <a:rPr lang="en-US" sz="1800" dirty="0"/>
-              <a:t>;</a:t>
-            </a:r>
-            <a:endParaRPr lang="en-DE" dirty="0"/>
-          </a:p>
-        </p:txBody>
-      </p:sp>
-      <p:sp>
-        <p:nvSpPr>
-          <p:cNvPr id="19" name="TextBox 18">
-            <a:extLst>
-              <a:ext uri="{FF2B5EF4-FFF2-40B4-BE49-F238E27FC236}">
-                <a16:creationId xmlns:a16="http://schemas.microsoft.com/office/drawing/2014/main" id="{528D9342-1505-8E1F-14A3-4BA121E7250E}"/>
-              </a:ext>
-            </a:extLst>
-          </p:cNvPr>
-          <p:cNvSpPr txBox="1"/>
-          <p:nvPr/>
-        </p:nvSpPr>
-        <p:spPr>
-          <a:xfrm>
-            <a:off x="0" y="5688449"/>
-            <a:ext cx="1429366" cy="1169551"/>
-          </a:xfrm>
-          <a:prstGeom prst="rect">
-            <a:avLst/>
-          </a:prstGeom>
-          <a:noFill/>
-          <a:ln>
-            <a:solidFill>
-              <a:schemeClr val="tx1"/>
-            </a:solidFill>
-            <a:prstDash val="dash"/>
-          </a:ln>
-        </p:spPr>
-        <p:txBody>
-          <a:bodyPr wrap="none" rtlCol="0">
-            <a:spAutoFit/>
-          </a:bodyPr>
-          <a:lstStyle/>
-          <a:p>
-            <a:r>
-              <a:rPr lang="en-US" sz="1400" dirty="0"/>
-              <a:t>Color key:</a:t>
-            </a:r>
-          </a:p>
-          <a:p>
-            <a:r>
-              <a:rPr lang="en-US" sz="1400" dirty="0">
-                <a:solidFill>
-                  <a:schemeClr val="accent1"/>
-                </a:solidFill>
-              </a:rPr>
-              <a:t>Character string</a:t>
-            </a:r>
-          </a:p>
-          <a:p>
-            <a:r>
-              <a:rPr lang="en-US" sz="1400" dirty="0">
-                <a:solidFill>
-                  <a:schemeClr val="accent6"/>
-                </a:solidFill>
-              </a:rPr>
-              <a:t>Numeric</a:t>
-            </a:r>
-          </a:p>
-          <a:p>
-            <a:r>
-              <a:rPr lang="en-US" sz="1400" dirty="0">
-                <a:solidFill>
-                  <a:schemeClr val="accent2"/>
-                </a:solidFill>
-              </a:rPr>
-              <a:t>Boolean</a:t>
-            </a:r>
-          </a:p>
-          <a:p>
-            <a:r>
-              <a:rPr lang="en-US" sz="1400" dirty="0">
-                <a:solidFill>
-                  <a:schemeClr val="accent5"/>
-                </a:solidFill>
-              </a:rPr>
-              <a:t>List</a:t>
-            </a:r>
-          </a:p>
-        </p:txBody>
-      </p:sp>
-      <p:sp>
-        <p:nvSpPr>
-          <p:cNvPr id="20" name="Rectangle 19">
-            <a:extLst>
-              <a:ext uri="{FF2B5EF4-FFF2-40B4-BE49-F238E27FC236}">
-                <a16:creationId xmlns:a16="http://schemas.microsoft.com/office/drawing/2014/main" id="{1CA55825-769B-1D16-2DA1-90F7182C6CF9}"/>
-              </a:ext>
-            </a:extLst>
-          </p:cNvPr>
-          <p:cNvSpPr/>
-          <p:nvPr/>
-        </p:nvSpPr>
-        <p:spPr>
-          <a:xfrm>
-            <a:off x="838200" y="1957756"/>
-            <a:ext cx="2696308" cy="1078524"/>
-          </a:xfrm>
-          <a:prstGeom prst="rect">
-            <a:avLst/>
-          </a:prstGeom>
-          <a:solidFill>
-            <a:schemeClr val="bg1">
-              <a:lumMod val="95000"/>
-            </a:schemeClr>
-          </a:solidFill>
-        </p:spPr>
-        <p:style>
-          <a:lnRef idx="2">
-            <a:schemeClr val="accent1">
-              <a:shade val="15000"/>
-            </a:schemeClr>
-          </a:lnRef>
-          <a:fillRef idx="1">
-            <a:schemeClr val="accent1"/>
-          </a:fillRef>
-          <a:effectRef idx="0">
-            <a:schemeClr val="accent1"/>
-          </a:effectRef>
-          <a:fontRef idx="minor">
-            <a:schemeClr val="lt1"/>
-          </a:fontRef>
-        </p:style>
-        <p:txBody>
-          <a:bodyPr rtlCol="0" anchor="ctr"/>
-          <a:lstStyle/>
-          <a:p>
-            <a:pPr algn="ctr"/>
-            <a:r>
-              <a:rPr lang="en-US" dirty="0">
-                <a:solidFill>
-                  <a:schemeClr val="tx1"/>
-                </a:solidFill>
-              </a:rPr>
-              <a:t>Locality</a:t>
-            </a:r>
-          </a:p>
-          <a:p>
-            <a:pPr algn="ctr"/>
-            <a:r>
-              <a:rPr lang="en-US" sz="1400" dirty="0" err="1">
-                <a:solidFill>
-                  <a:schemeClr val="tx1"/>
-                </a:solidFill>
-              </a:rPr>
-              <a:t>road_get_localities</a:t>
-            </a:r>
-            <a:r>
-              <a:rPr lang="en-US" sz="1400" dirty="0">
-                <a:solidFill>
-                  <a:schemeClr val="tx1"/>
-                </a:solidFill>
-              </a:rPr>
-              <a:t>()</a:t>
-            </a:r>
-            <a:endParaRPr lang="en-DE" sz="1400" dirty="0">
-              <a:solidFill>
-                <a:schemeClr val="tx1"/>
-              </a:solidFill>
-            </a:endParaRPr>
-          </a:p>
-        </p:txBody>
-      </p:sp>
-      <p:sp>
-        <p:nvSpPr>
-          <p:cNvPr id="21" name="Rectangle 20">
-            <a:extLst>
-              <a:ext uri="{FF2B5EF4-FFF2-40B4-BE49-F238E27FC236}">
-                <a16:creationId xmlns:a16="http://schemas.microsoft.com/office/drawing/2014/main" id="{EFBCFCC0-4456-917A-95A1-4E2983AA057E}"/>
-              </a:ext>
-            </a:extLst>
-          </p:cNvPr>
-          <p:cNvSpPr/>
-          <p:nvPr/>
-        </p:nvSpPr>
-        <p:spPr>
-          <a:xfrm>
-            <a:off x="4747846" y="1957756"/>
-            <a:ext cx="2696308" cy="1078524"/>
-          </a:xfrm>
-          <a:prstGeom prst="rect">
-            <a:avLst/>
-          </a:prstGeom>
-          <a:solidFill>
-            <a:schemeClr val="bg1">
-              <a:lumMod val="95000"/>
-            </a:schemeClr>
-          </a:solidFill>
-        </p:spPr>
-        <p:style>
-          <a:lnRef idx="2">
-            <a:schemeClr val="accent1">
-              <a:shade val="15000"/>
-            </a:schemeClr>
-          </a:lnRef>
-          <a:fillRef idx="1">
-            <a:schemeClr val="accent1"/>
-          </a:fillRef>
-          <a:effectRef idx="0">
-            <a:schemeClr val="accent1"/>
-          </a:effectRef>
-          <a:fontRef idx="minor">
-            <a:schemeClr val="lt1"/>
-          </a:fontRef>
-        </p:style>
-        <p:txBody>
-          <a:bodyPr rtlCol="0" anchor="ctr"/>
-          <a:lstStyle/>
-          <a:p>
-            <a:pPr algn="ctr"/>
-            <a:r>
-              <a:rPr lang="en-US" dirty="0">
-                <a:solidFill>
-                  <a:schemeClr val="tx1"/>
-                </a:solidFill>
-              </a:rPr>
-              <a:t>Assemblage</a:t>
-            </a:r>
-            <a:br>
-              <a:rPr lang="en-US" dirty="0">
-                <a:solidFill>
-                  <a:schemeClr val="tx1"/>
-                </a:solidFill>
-              </a:rPr>
-            </a:br>
-            <a:r>
-              <a:rPr lang="en-US" sz="1400" dirty="0" err="1">
-                <a:solidFill>
-                  <a:schemeClr val="tx1"/>
-                </a:solidFill>
-              </a:rPr>
-              <a:t>road_get_assemblages</a:t>
-            </a:r>
-            <a:r>
-              <a:rPr lang="en-US" sz="1400" dirty="0">
-                <a:solidFill>
-                  <a:schemeClr val="tx1"/>
-                </a:solidFill>
-              </a:rPr>
-              <a:t>()</a:t>
-            </a:r>
-            <a:endParaRPr lang="en-DE" dirty="0">
-              <a:solidFill>
-                <a:schemeClr val="tx1"/>
-              </a:solidFill>
-            </a:endParaRPr>
-          </a:p>
-        </p:txBody>
-      </p:sp>
-      <p:sp>
-        <p:nvSpPr>
-          <p:cNvPr id="22" name="Rectangle 21">
-            <a:extLst>
-              <a:ext uri="{FF2B5EF4-FFF2-40B4-BE49-F238E27FC236}">
-                <a16:creationId xmlns:a16="http://schemas.microsoft.com/office/drawing/2014/main" id="{E9655F6B-20A2-DF34-2745-5E9E5844377C}"/>
-              </a:ext>
-            </a:extLst>
-          </p:cNvPr>
-          <p:cNvSpPr/>
-          <p:nvPr/>
-        </p:nvSpPr>
-        <p:spPr>
-          <a:xfrm>
-            <a:off x="8657492" y="1957756"/>
-            <a:ext cx="2696308" cy="1078524"/>
-          </a:xfrm>
-          <a:prstGeom prst="rect">
-            <a:avLst/>
-          </a:prstGeom>
-          <a:solidFill>
-            <a:schemeClr val="bg1">
-              <a:lumMod val="95000"/>
-            </a:schemeClr>
-          </a:solidFill>
-        </p:spPr>
-        <p:style>
-          <a:lnRef idx="2">
-            <a:schemeClr val="accent1">
-              <a:shade val="15000"/>
-            </a:schemeClr>
-          </a:lnRef>
-          <a:fillRef idx="1">
-            <a:schemeClr val="accent1"/>
-          </a:fillRef>
-          <a:effectRef idx="0">
-            <a:schemeClr val="accent1"/>
-          </a:effectRef>
-          <a:fontRef idx="minor">
-            <a:schemeClr val="lt1"/>
-          </a:fontRef>
-        </p:style>
-        <p:txBody>
-          <a:bodyPr rtlCol="0" anchor="ctr"/>
-          <a:lstStyle/>
-          <a:p>
-            <a:pPr algn="ctr"/>
-            <a:r>
-              <a:rPr lang="en-US" dirty="0">
-                <a:solidFill>
-                  <a:schemeClr val="tx1"/>
-                </a:solidFill>
-              </a:rPr>
-              <a:t>Date</a:t>
-            </a:r>
-            <a:br>
-              <a:rPr lang="en-US" dirty="0">
-                <a:solidFill>
-                  <a:schemeClr val="tx1"/>
-                </a:solidFill>
-              </a:rPr>
-            </a:br>
-            <a:r>
-              <a:rPr lang="en-US" sz="1400" dirty="0" err="1">
-                <a:solidFill>
-                  <a:schemeClr val="tx1"/>
-                </a:solidFill>
-              </a:rPr>
-              <a:t>road_get_dates</a:t>
-            </a:r>
-            <a:r>
-              <a:rPr lang="en-US" sz="1400" dirty="0">
-                <a:solidFill>
-                  <a:schemeClr val="tx1"/>
-                </a:solidFill>
-              </a:rPr>
-              <a:t>()</a:t>
-            </a:r>
-            <a:endParaRPr lang="en-DE" dirty="0">
-              <a:solidFill>
-                <a:schemeClr val="tx1"/>
-              </a:solidFill>
-            </a:endParaRPr>
-          </a:p>
-        </p:txBody>
-      </p:sp>
-      <p:cxnSp>
-        <p:nvCxnSpPr>
-          <p:cNvPr id="23" name="Straight Arrow Connector 22">
-            <a:extLst>
-              <a:ext uri="{FF2B5EF4-FFF2-40B4-BE49-F238E27FC236}">
-                <a16:creationId xmlns:a16="http://schemas.microsoft.com/office/drawing/2014/main" id="{06433E44-58D6-A104-43BB-81EA911AF6E2}"/>
-              </a:ext>
-            </a:extLst>
-          </p:cNvPr>
-          <p:cNvCxnSpPr>
-            <a:stCxn id="20" idx="3"/>
-            <a:endCxn id="21" idx="1"/>
-          </p:cNvCxnSpPr>
-          <p:nvPr/>
-        </p:nvCxnSpPr>
-        <p:spPr>
-          <a:xfrm>
-            <a:off x="3534508" y="2497018"/>
-            <a:ext cx="1213338" cy="0"/>
-          </a:xfrm>
-          <a:prstGeom prst="straightConnector1">
-            <a:avLst/>
-          </a:prstGeom>
-          <a:ln>
-            <a:solidFill>
-              <a:schemeClr val="tx1"/>
-            </a:solidFill>
-            <a:tailEnd type="triangle"/>
-          </a:ln>
-        </p:spPr>
-        <p:style>
-          <a:lnRef idx="2">
-            <a:schemeClr val="accent1"/>
-          </a:lnRef>
-          <a:fillRef idx="0">
-            <a:schemeClr val="accent1"/>
-          </a:fillRef>
-          <a:effectRef idx="1">
-            <a:schemeClr val="accent1"/>
-          </a:effectRef>
-          <a:fontRef idx="minor">
-            <a:schemeClr val="tx1"/>
-          </a:fontRef>
-        </p:style>
-      </p:cxnSp>
-      <p:cxnSp>
-        <p:nvCxnSpPr>
-          <p:cNvPr id="24" name="Straight Arrow Connector 23">
-            <a:extLst>
-              <a:ext uri="{FF2B5EF4-FFF2-40B4-BE49-F238E27FC236}">
-                <a16:creationId xmlns:a16="http://schemas.microsoft.com/office/drawing/2014/main" id="{F498FF9C-0C06-6369-CBD9-1D196CF979C5}"/>
-              </a:ext>
-            </a:extLst>
-          </p:cNvPr>
-          <p:cNvCxnSpPr>
-            <a:cxnSpLocks/>
-            <a:stCxn id="21" idx="3"/>
-            <a:endCxn id="22" idx="1"/>
-          </p:cNvCxnSpPr>
-          <p:nvPr/>
-        </p:nvCxnSpPr>
-        <p:spPr>
-          <a:xfrm>
-            <a:off x="7444154" y="2497018"/>
-            <a:ext cx="1213338" cy="0"/>
-          </a:xfrm>
-          <a:prstGeom prst="straightConnector1">
-            <a:avLst/>
-          </a:prstGeom>
-          <a:ln>
-            <a:solidFill>
-              <a:schemeClr val="tx1"/>
-            </a:solidFill>
-            <a:tailEnd type="triangle"/>
-          </a:ln>
-        </p:spPr>
-        <p:style>
-          <a:lnRef idx="2">
-            <a:schemeClr val="accent1"/>
-          </a:lnRef>
-          <a:fillRef idx="0">
-            <a:schemeClr val="accent1"/>
-          </a:fillRef>
-          <a:effectRef idx="1">
-            <a:schemeClr val="accent1"/>
-          </a:effectRef>
-          <a:fontRef idx="minor">
-            <a:schemeClr val="tx1"/>
-          </a:fontRef>
-        </p:style>
-      </p:cxnSp>
-      <p:pic>
-        <p:nvPicPr>
-          <p:cNvPr id="25" name="Graphic 24" descr="Layers Design with solid fill">
-            <a:extLst>
-              <a:ext uri="{FF2B5EF4-FFF2-40B4-BE49-F238E27FC236}">
-                <a16:creationId xmlns:a16="http://schemas.microsoft.com/office/drawing/2014/main" id="{3CD5F279-CD41-C119-6DB8-146CF32F56F1}"/>
-              </a:ext>
-            </a:extLst>
-          </p:cNvPr>
-          <p:cNvPicPr>
-            <a:picLocks noChangeAspect="1"/>
-          </p:cNvPicPr>
-          <p:nvPr/>
-        </p:nvPicPr>
-        <p:blipFill>
-          <a:blip r:embed="rId2">
-            <a:extLst>
-              <a:ext uri="{96DAC541-7B7A-43D3-8B79-37D633B846F1}">
-                <asvg:svgBlip xmlns:asvg="http://schemas.microsoft.com/office/drawing/2016/SVG/main" r:embed="rId3"/>
-              </a:ext>
-            </a:extLst>
-          </a:blip>
-          <a:stretch>
-            <a:fillRect/>
-          </a:stretch>
-        </p:blipFill>
-        <p:spPr>
-          <a:xfrm>
-            <a:off x="4965367" y="2149591"/>
-            <a:ext cx="432000" cy="432000"/>
-          </a:xfrm>
-          <a:prstGeom prst="rect">
-            <a:avLst/>
-          </a:prstGeom>
-        </p:spPr>
-      </p:pic>
-      <p:pic>
-        <p:nvPicPr>
-          <p:cNvPr id="26" name="Graphic 25" descr="Marker with solid fill">
-            <a:extLst>
-              <a:ext uri="{FF2B5EF4-FFF2-40B4-BE49-F238E27FC236}">
-                <a16:creationId xmlns:a16="http://schemas.microsoft.com/office/drawing/2014/main" id="{AE25D0F4-BDFE-30DF-DB34-9EBFD47536F5}"/>
-              </a:ext>
-            </a:extLst>
-          </p:cNvPr>
-          <p:cNvPicPr>
-            <a:picLocks noChangeAspect="1"/>
-          </p:cNvPicPr>
-          <p:nvPr/>
-        </p:nvPicPr>
-        <p:blipFill>
-          <a:blip r:embed="rId4">
-            <a:extLst>
-              <a:ext uri="{96DAC541-7B7A-43D3-8B79-37D633B846F1}">
-                <asvg:svgBlip xmlns:asvg="http://schemas.microsoft.com/office/drawing/2016/SVG/main" r:embed="rId5"/>
-              </a:ext>
-            </a:extLst>
-          </a:blip>
-          <a:stretch>
-            <a:fillRect/>
-          </a:stretch>
-        </p:blipFill>
-        <p:spPr>
-          <a:xfrm>
-            <a:off x="1396014" y="2149591"/>
-            <a:ext cx="432000" cy="432000"/>
-          </a:xfrm>
-          <a:prstGeom prst="rect">
-            <a:avLst/>
-          </a:prstGeom>
-        </p:spPr>
-      </p:pic>
-      <p:pic>
-        <p:nvPicPr>
-          <p:cNvPr id="27" name="Graphic 26" descr="Hourglass Finished with solid fill">
-            <a:extLst>
-              <a:ext uri="{FF2B5EF4-FFF2-40B4-BE49-F238E27FC236}">
-                <a16:creationId xmlns:a16="http://schemas.microsoft.com/office/drawing/2014/main" id="{A41E36FC-654B-BE48-6980-242377998D33}"/>
-              </a:ext>
-            </a:extLst>
-          </p:cNvPr>
-          <p:cNvPicPr>
-            <a:picLocks noChangeAspect="1"/>
-          </p:cNvPicPr>
-          <p:nvPr/>
-        </p:nvPicPr>
-        <p:blipFill>
-          <a:blip r:embed="rId6">
-            <a:extLst>
-              <a:ext uri="{96DAC541-7B7A-43D3-8B79-37D633B846F1}">
-                <asvg:svgBlip xmlns:asvg="http://schemas.microsoft.com/office/drawing/2016/SVG/main" r:embed="rId7"/>
-              </a:ext>
-            </a:extLst>
-          </a:blip>
-          <a:stretch>
-            <a:fillRect/>
-          </a:stretch>
-        </p:blipFill>
-        <p:spPr>
-          <a:xfrm>
-            <a:off x="9386133" y="2190344"/>
-            <a:ext cx="360000" cy="360000"/>
-          </a:xfrm>
-          <a:prstGeom prst="rect">
-            <a:avLst/>
-          </a:prstGeom>
-        </p:spPr>
-      </p:pic>
-    </p:spTree>
-    <p:extLst>
-      <p:ext uri="{BB962C8B-B14F-4D97-AF65-F5344CB8AC3E}">
-        <p14:creationId xmlns:p14="http://schemas.microsoft.com/office/powerpoint/2010/main" val="2974061982"/>
-      </p:ext>
-    </p:extLst>
-  </p:cSld>
-  <p:clrMapOvr>
-    <a:masterClrMapping/>
-  </p:clrMapOvr>
-</p:sld>
-</file>
-
-<file path=ppt/slides/slide8.xml><?xml version="1.0" encoding="utf-8"?>
-<p:sld xmlns:a="http://schemas.openxmlformats.org/drawingml/2006/main" xmlns:r="http://schemas.openxmlformats.org/officeDocument/2006/relationships" xmlns:p="http://schemas.openxmlformats.org/presentationml/2006/main">
-  <p:cSld>
-    <p:spTree>
-      <p:nvGrpSpPr>
-        <p:cNvPr id="1" name="">
-          <a:extLst>
-            <a:ext uri="{FF2B5EF4-FFF2-40B4-BE49-F238E27FC236}">
               <a16:creationId xmlns:a16="http://schemas.microsoft.com/office/drawing/2014/main" id="{1A6B6F29-9B2D-A2B0-AA3D-45BCF4D1D44C}"/>
             </a:ext>
           </a:extLst>
@@ -10200,31 +8860,7 @@
                   <a:schemeClr val="tx1"/>
                 </a:solidFill>
               </a:rPr>
-              <a:t>road_get</a:t>
-            </a:r>
-            <a:r>
-              <a:rPr lang="en-US" sz="1400" err="1">
-                <a:solidFill>
-                  <a:schemeClr val="tx1"/>
-                </a:solidFill>
-              </a:rPr>
-              <a:t>_</a:t>
-            </a:r>
-            <a:r>
-              <a:rPr lang="en-US" sz="1400">
-                <a:solidFill>
-                  <a:schemeClr val="tx1"/>
-                </a:solidFill>
-              </a:rPr>
-              <a:t>miscellaneous</a:t>
-            </a:r>
-            <a:r>
-              <a:rPr lang="en-US" sz="1400" dirty="0" err="1">
-                <a:solidFill>
-                  <a:schemeClr val="tx1"/>
-                </a:solidFill>
-              </a:rPr>
-              <a:t>_finds</a:t>
+              <a:t>road_get_miscellaneous_finds</a:t>
             </a:r>
             <a:r>
               <a:rPr lang="en-US" sz="1400" dirty="0">
@@ -10808,7 +9444,7 @@
 </p:sld>
 </file>
 
-<file path=ppt/slides/slide9.xml><?xml version="1.0" encoding="utf-8"?>
+<file path=ppt/slides/slide7.xml><?xml version="1.0" encoding="utf-8"?>
 <p:sld xmlns:a="http://schemas.openxmlformats.org/drawingml/2006/main" xmlns:r="http://schemas.openxmlformats.org/officeDocument/2006/relationships" xmlns:p="http://schemas.openxmlformats.org/presentationml/2006/main" show="0">
   <p:cSld>
     <p:spTree>
@@ -10883,6 +9519,1352 @@
     <p:extLst>
       <p:ext uri="{BB962C8B-B14F-4D97-AF65-F5344CB8AC3E}">
         <p14:creationId xmlns:p14="http://schemas.microsoft.com/office/powerpoint/2010/main" val="3650416559"/>
+      </p:ext>
+    </p:extLst>
+  </p:cSld>
+  <p:clrMapOvr>
+    <a:masterClrMapping/>
+  </p:clrMapOvr>
+</p:sld>
+</file>
+
+<file path=ppt/slides/slide8.xml><?xml version="1.0" encoding="utf-8"?>
+<p:sld xmlns:a="http://schemas.openxmlformats.org/drawingml/2006/main" xmlns:r="http://schemas.openxmlformats.org/officeDocument/2006/relationships" xmlns:p="http://schemas.openxmlformats.org/presentationml/2006/main" show="0">
+  <p:cSld>
+    <p:spTree>
+      <p:nvGrpSpPr>
+        <p:cNvPr id="1" name=""/>
+        <p:cNvGrpSpPr/>
+        <p:nvPr/>
+      </p:nvGrpSpPr>
+      <p:grpSpPr>
+        <a:xfrm>
+          <a:off x="0" y="0"/>
+          <a:ext cx="0" cy="0"/>
+          <a:chOff x="0" y="0"/>
+          <a:chExt cx="0" cy="0"/>
+        </a:xfrm>
+      </p:grpSpPr>
+      <p:sp>
+        <p:nvSpPr>
+          <p:cNvPr id="4" name="Title 3">
+            <a:extLst>
+              <a:ext uri="{FF2B5EF4-FFF2-40B4-BE49-F238E27FC236}">
+                <a16:creationId xmlns:a16="http://schemas.microsoft.com/office/drawing/2014/main" id="{B7C71F2F-129F-7804-A476-B72A202AC412}"/>
+              </a:ext>
+            </a:extLst>
+          </p:cNvPr>
+          <p:cNvSpPr>
+            <a:spLocks noGrp="1"/>
+          </p:cNvSpPr>
+          <p:nvPr>
+            <p:ph type="title"/>
+          </p:nvPr>
+        </p:nvSpPr>
+        <p:spPr/>
+        <p:txBody>
+          <a:bodyPr/>
+          <a:lstStyle/>
+          <a:p>
+            <a:r>
+              <a:rPr lang="en-US" dirty="0" err="1"/>
+              <a:t>road_get_localities</a:t>
+            </a:r>
+            <a:r>
+              <a:rPr lang="en-US" dirty="0"/>
+              <a:t>()</a:t>
+            </a:r>
+            <a:endParaRPr lang="en-DE" dirty="0"/>
+          </a:p>
+        </p:txBody>
+      </p:sp>
+      <p:sp>
+        <p:nvSpPr>
+          <p:cNvPr id="7" name="Content Placeholder 6">
+            <a:extLst>
+              <a:ext uri="{FF2B5EF4-FFF2-40B4-BE49-F238E27FC236}">
+                <a16:creationId xmlns:a16="http://schemas.microsoft.com/office/drawing/2014/main" id="{C6B134FA-60BA-B52C-D29C-B29FD7C6FA95}"/>
+              </a:ext>
+            </a:extLst>
+          </p:cNvPr>
+          <p:cNvSpPr>
+            <a:spLocks noGrp="1"/>
+          </p:cNvSpPr>
+          <p:nvPr>
+            <p:ph idx="1"/>
+          </p:nvPr>
+        </p:nvSpPr>
+        <p:spPr/>
+        <p:txBody>
+          <a:bodyPr/>
+          <a:lstStyle/>
+          <a:p>
+            <a:endParaRPr lang="en-DE"/>
+          </a:p>
+        </p:txBody>
+      </p:sp>
+      <p:pic>
+        <p:nvPicPr>
+          <p:cNvPr id="9" name="Picture 8">
+            <a:extLst>
+              <a:ext uri="{FF2B5EF4-FFF2-40B4-BE49-F238E27FC236}">
+                <a16:creationId xmlns:a16="http://schemas.microsoft.com/office/drawing/2014/main" id="{A47F3AAE-C79F-2D3D-D0B3-DC148D632712}"/>
+              </a:ext>
+            </a:extLst>
+          </p:cNvPr>
+          <p:cNvPicPr>
+            <a:picLocks noChangeAspect="1"/>
+          </p:cNvPicPr>
+          <p:nvPr/>
+        </p:nvPicPr>
+        <p:blipFill>
+          <a:blip r:embed="rId2"/>
+          <a:stretch>
+            <a:fillRect/>
+          </a:stretch>
+        </p:blipFill>
+        <p:spPr>
+          <a:xfrm>
+            <a:off x="2261652" y="2300844"/>
+            <a:ext cx="7668695" cy="3400900"/>
+          </a:xfrm>
+          <a:prstGeom prst="rect">
+            <a:avLst/>
+          </a:prstGeom>
+        </p:spPr>
+      </p:pic>
+    </p:spTree>
+    <p:extLst>
+      <p:ext uri="{BB962C8B-B14F-4D97-AF65-F5344CB8AC3E}">
+        <p14:creationId xmlns:p14="http://schemas.microsoft.com/office/powerpoint/2010/main" val="3918839550"/>
+      </p:ext>
+    </p:extLst>
+  </p:cSld>
+  <p:clrMapOvr>
+    <a:masterClrMapping/>
+  </p:clrMapOvr>
+</p:sld>
+</file>
+
+<file path=ppt/slides/slide9.xml><?xml version="1.0" encoding="utf-8"?>
+<p:sld xmlns:a="http://schemas.openxmlformats.org/drawingml/2006/main" xmlns:r="http://schemas.openxmlformats.org/officeDocument/2006/relationships" xmlns:p="http://schemas.openxmlformats.org/presentationml/2006/main" show="0">
+  <p:cSld>
+    <p:spTree>
+      <p:nvGrpSpPr>
+        <p:cNvPr id="1" name="">
+          <a:extLst>
+            <a:ext uri="{FF2B5EF4-FFF2-40B4-BE49-F238E27FC236}">
+              <a16:creationId xmlns:a16="http://schemas.microsoft.com/office/drawing/2014/main" id="{A5FE146E-7BAE-1678-07F6-F2A0637BA42C}"/>
+            </a:ext>
+          </a:extLst>
+        </p:cNvPr>
+        <p:cNvGrpSpPr/>
+        <p:nvPr/>
+      </p:nvGrpSpPr>
+      <p:grpSpPr>
+        <a:xfrm>
+          <a:off x="0" y="0"/>
+          <a:ext cx="0" cy="0"/>
+          <a:chOff x="0" y="0"/>
+          <a:chExt cx="0" cy="0"/>
+        </a:xfrm>
+      </p:grpSpPr>
+      <p:sp>
+        <p:nvSpPr>
+          <p:cNvPr id="2" name="Title 1">
+            <a:extLst>
+              <a:ext uri="{FF2B5EF4-FFF2-40B4-BE49-F238E27FC236}">
+                <a16:creationId xmlns:a16="http://schemas.microsoft.com/office/drawing/2014/main" id="{2627A322-1278-66BD-44A1-546430E4113C}"/>
+              </a:ext>
+            </a:extLst>
+          </p:cNvPr>
+          <p:cNvSpPr>
+            <a:spLocks noGrp="1"/>
+          </p:cNvSpPr>
+          <p:nvPr>
+            <p:ph type="title"/>
+          </p:nvPr>
+        </p:nvSpPr>
+        <p:spPr/>
+        <p:txBody>
+          <a:bodyPr/>
+          <a:lstStyle/>
+          <a:p>
+            <a:r>
+              <a:rPr lang="en-US" dirty="0"/>
+              <a:t>LOD-related outputs</a:t>
+            </a:r>
+            <a:endParaRPr lang="en-DE" dirty="0"/>
+          </a:p>
+        </p:txBody>
+      </p:sp>
+      <p:sp>
+        <p:nvSpPr>
+          <p:cNvPr id="8" name="Arrow: Right 7">
+            <a:extLst>
+              <a:ext uri="{FF2B5EF4-FFF2-40B4-BE49-F238E27FC236}">
+                <a16:creationId xmlns:a16="http://schemas.microsoft.com/office/drawing/2014/main" id="{F1FFE1F5-72F3-52E8-1818-531F9CEF83CD}"/>
+              </a:ext>
+            </a:extLst>
+          </p:cNvPr>
+          <p:cNvSpPr/>
+          <p:nvPr/>
+        </p:nvSpPr>
+        <p:spPr>
+          <a:xfrm>
+            <a:off x="838199" y="1301265"/>
+            <a:ext cx="10515599" cy="559803"/>
+          </a:xfrm>
+          <a:prstGeom prst="rightArrow">
+            <a:avLst/>
+          </a:prstGeom>
+          <a:solidFill>
+            <a:schemeClr val="bg1">
+              <a:lumMod val="95000"/>
+            </a:schemeClr>
+          </a:solidFill>
+          <a:ln>
+            <a:solidFill>
+              <a:schemeClr val="tx1"/>
+            </a:solidFill>
+          </a:ln>
+        </p:spPr>
+        <p:style>
+          <a:lnRef idx="2">
+            <a:schemeClr val="accent1">
+              <a:shade val="15000"/>
+            </a:schemeClr>
+          </a:lnRef>
+          <a:fillRef idx="1">
+            <a:schemeClr val="accent1"/>
+          </a:fillRef>
+          <a:effectRef idx="0">
+            <a:schemeClr val="accent1"/>
+          </a:effectRef>
+          <a:fontRef idx="minor">
+            <a:schemeClr val="lt1"/>
+          </a:fontRef>
+        </p:style>
+        <p:txBody>
+          <a:bodyPr rtlCol="0" anchor="ctr"/>
+          <a:lstStyle/>
+          <a:p>
+            <a:pPr algn="ctr"/>
+            <a:r>
+              <a:rPr lang="en-US" dirty="0">
+                <a:solidFill>
+                  <a:schemeClr val="tx1"/>
+                </a:solidFill>
+              </a:rPr>
+              <a:t>Inheritance of outputs with increasing Level of Detail</a:t>
+            </a:r>
+            <a:endParaRPr lang="en-DE" dirty="0">
+              <a:solidFill>
+                <a:schemeClr val="tx1"/>
+              </a:solidFill>
+            </a:endParaRPr>
+          </a:p>
+        </p:txBody>
+      </p:sp>
+      <p:sp>
+        <p:nvSpPr>
+          <p:cNvPr id="5" name="TextBox 4">
+            <a:extLst>
+              <a:ext uri="{FF2B5EF4-FFF2-40B4-BE49-F238E27FC236}">
+                <a16:creationId xmlns:a16="http://schemas.microsoft.com/office/drawing/2014/main" id="{2F4313BA-807C-928A-4277-FF1FE29A8420}"/>
+              </a:ext>
+            </a:extLst>
+          </p:cNvPr>
+          <p:cNvSpPr txBox="1"/>
+          <p:nvPr/>
+        </p:nvSpPr>
+        <p:spPr>
+          <a:xfrm>
+            <a:off x="838200" y="3429000"/>
+            <a:ext cx="2696308" cy="1061829"/>
+          </a:xfrm>
+          <a:prstGeom prst="rect">
+            <a:avLst/>
+          </a:prstGeom>
+          <a:noFill/>
+        </p:spPr>
+        <p:txBody>
+          <a:bodyPr wrap="square" rtlCol="0">
+            <a:spAutoFit/>
+          </a:bodyPr>
+          <a:lstStyle/>
+          <a:p>
+            <a:r>
+              <a:rPr lang="en-US" dirty="0"/>
+              <a:t>Columns:</a:t>
+            </a:r>
+          </a:p>
+          <a:p>
+            <a:r>
+              <a:rPr lang="en-US" sz="1500" dirty="0">
+                <a:solidFill>
+                  <a:schemeClr val="accent1"/>
+                </a:solidFill>
+              </a:rPr>
+              <a:t>locality</a:t>
+            </a:r>
+            <a:r>
+              <a:rPr lang="en-US" sz="1500" dirty="0"/>
+              <a:t>, </a:t>
+            </a:r>
+            <a:r>
+              <a:rPr lang="en-US" sz="1500" dirty="0">
+                <a:solidFill>
+                  <a:schemeClr val="accent1"/>
+                </a:solidFill>
+              </a:rPr>
+              <a:t>country</a:t>
+            </a:r>
+            <a:r>
+              <a:rPr lang="en-US" sz="1500" dirty="0"/>
+              <a:t>, </a:t>
+            </a:r>
+            <a:r>
+              <a:rPr lang="en-US" sz="1500" dirty="0">
+                <a:solidFill>
+                  <a:schemeClr val="accent1"/>
+                </a:solidFill>
+              </a:rPr>
+              <a:t>continent</a:t>
+            </a:r>
+            <a:r>
+              <a:rPr lang="en-US" sz="1500" dirty="0"/>
+              <a:t>, </a:t>
+            </a:r>
+            <a:r>
+              <a:rPr lang="en-US" sz="1500" dirty="0">
+                <a:solidFill>
+                  <a:schemeClr val="accent1"/>
+                </a:solidFill>
+              </a:rPr>
+              <a:t>subcontinent</a:t>
+            </a:r>
+            <a:r>
+              <a:rPr lang="en-US" sz="1500" dirty="0"/>
+              <a:t>, </a:t>
+            </a:r>
+            <a:r>
+              <a:rPr lang="en-US" sz="1500" dirty="0" err="1">
+                <a:solidFill>
+                  <a:schemeClr val="accent1"/>
+                </a:solidFill>
+              </a:rPr>
+              <a:t>locality_type</a:t>
+            </a:r>
+            <a:r>
+              <a:rPr lang="en-US" sz="1500" dirty="0"/>
+              <a:t>, </a:t>
+            </a:r>
+            <a:br>
+              <a:rPr lang="en-US" sz="1500" dirty="0"/>
+            </a:br>
+            <a:r>
+              <a:rPr lang="en-US" sz="1500" dirty="0">
+                <a:solidFill>
+                  <a:schemeClr val="accent6"/>
+                </a:solidFill>
+              </a:rPr>
+              <a:t>x</a:t>
+            </a:r>
+            <a:r>
+              <a:rPr lang="en-US" sz="1500" dirty="0"/>
+              <a:t>, </a:t>
+            </a:r>
+            <a:r>
+              <a:rPr lang="en-US" sz="1500" dirty="0">
+                <a:solidFill>
+                  <a:schemeClr val="accent6"/>
+                </a:solidFill>
+              </a:rPr>
+              <a:t>y</a:t>
+            </a:r>
+            <a:r>
+              <a:rPr lang="en-US" sz="1500" dirty="0"/>
+              <a:t>;</a:t>
+            </a:r>
+            <a:endParaRPr lang="en-DE" sz="1500" dirty="0"/>
+          </a:p>
+        </p:txBody>
+      </p:sp>
+      <p:sp>
+        <p:nvSpPr>
+          <p:cNvPr id="14" name="TextBox 13">
+            <a:extLst>
+              <a:ext uri="{FF2B5EF4-FFF2-40B4-BE49-F238E27FC236}">
+                <a16:creationId xmlns:a16="http://schemas.microsoft.com/office/drawing/2014/main" id="{0622A2CF-1027-8C3F-1195-7EC4CF0DAEAC}"/>
+              </a:ext>
+            </a:extLst>
+          </p:cNvPr>
+          <p:cNvSpPr txBox="1"/>
+          <p:nvPr/>
+        </p:nvSpPr>
+        <p:spPr>
+          <a:xfrm>
+            <a:off x="4747845" y="3429000"/>
+            <a:ext cx="2696308" cy="3370153"/>
+          </a:xfrm>
+          <a:prstGeom prst="rect">
+            <a:avLst/>
+          </a:prstGeom>
+          <a:noFill/>
+        </p:spPr>
+        <p:txBody>
+          <a:bodyPr wrap="square" rtlCol="0">
+            <a:spAutoFit/>
+          </a:bodyPr>
+          <a:lstStyle/>
+          <a:p>
+            <a:r>
+              <a:rPr lang="en-US" dirty="0"/>
+              <a:t>Columns:</a:t>
+            </a:r>
+          </a:p>
+          <a:p>
+            <a:r>
+              <a:rPr lang="en-US" sz="1500" i="1" dirty="0"/>
+              <a:t>All from locality plus</a:t>
+            </a:r>
+          </a:p>
+          <a:p>
+            <a:r>
+              <a:rPr lang="en-US" sz="1500" dirty="0" err="1">
+                <a:solidFill>
+                  <a:schemeClr val="accent1"/>
+                </a:solidFill>
+              </a:rPr>
+              <a:t>assemblage_name</a:t>
+            </a:r>
+            <a:r>
+              <a:rPr lang="en-US" sz="1500" dirty="0"/>
+              <a:t>, </a:t>
+            </a:r>
+            <a:r>
+              <a:rPr lang="en-US" sz="1500" dirty="0" err="1">
+                <a:solidFill>
+                  <a:schemeClr val="accent1"/>
+                </a:solidFill>
+              </a:rPr>
+              <a:t>assemblage_id</a:t>
+            </a:r>
+            <a:r>
+              <a:rPr lang="en-US" sz="1500" dirty="0"/>
+              <a:t>, </a:t>
+            </a:r>
+            <a:r>
+              <a:rPr lang="en-US" sz="1500" dirty="0">
+                <a:solidFill>
+                  <a:schemeClr val="accent2"/>
+                </a:solidFill>
+              </a:rPr>
+              <a:t>technology</a:t>
+            </a:r>
+            <a:r>
+              <a:rPr lang="en-US" sz="1500" dirty="0"/>
+              <a:t>, </a:t>
+            </a:r>
+            <a:r>
+              <a:rPr lang="en-US" sz="1500" dirty="0">
+                <a:solidFill>
+                  <a:schemeClr val="accent2"/>
+                </a:solidFill>
+              </a:rPr>
+              <a:t>typology</a:t>
+            </a:r>
+            <a:r>
+              <a:rPr lang="en-US" sz="1500" dirty="0"/>
+              <a:t>, </a:t>
+            </a:r>
+            <a:r>
+              <a:rPr lang="en-US" sz="1500" dirty="0" err="1">
+                <a:solidFill>
+                  <a:schemeClr val="accent2"/>
+                </a:solidFill>
+              </a:rPr>
+              <a:t>raw_material</a:t>
+            </a:r>
+            <a:r>
+              <a:rPr lang="en-US" sz="1500" dirty="0"/>
+              <a:t>, </a:t>
+            </a:r>
+            <a:r>
+              <a:rPr lang="en-US" sz="1500" dirty="0">
+                <a:solidFill>
+                  <a:schemeClr val="accent2"/>
+                </a:solidFill>
+              </a:rPr>
+              <a:t>function</a:t>
+            </a:r>
+            <a:r>
+              <a:rPr lang="en-US" sz="1500" dirty="0"/>
+              <a:t>, </a:t>
+            </a:r>
+            <a:r>
+              <a:rPr lang="en-US" sz="1500" dirty="0" err="1">
+                <a:solidFill>
+                  <a:schemeClr val="accent2"/>
+                </a:solidFill>
+              </a:rPr>
+              <a:t>miscelaneous_finds</a:t>
+            </a:r>
+            <a:r>
+              <a:rPr lang="en-US" sz="1500" dirty="0"/>
+              <a:t>, </a:t>
+            </a:r>
+            <a:r>
+              <a:rPr lang="en-US" sz="1500" dirty="0" err="1">
+                <a:solidFill>
+                  <a:schemeClr val="accent2"/>
+                </a:solidFill>
+              </a:rPr>
+              <a:t>organic_tools</a:t>
+            </a:r>
+            <a:r>
+              <a:rPr lang="en-US" sz="1500" dirty="0"/>
+              <a:t>, </a:t>
+            </a:r>
+            <a:r>
+              <a:rPr lang="en-US" sz="1500" dirty="0" err="1">
+                <a:solidFill>
+                  <a:schemeClr val="accent2"/>
+                </a:solidFill>
+              </a:rPr>
+              <a:t>symbolic_artifacts</a:t>
+            </a:r>
+            <a:r>
+              <a:rPr lang="en-US" sz="1500" dirty="0"/>
+              <a:t>, </a:t>
+            </a:r>
+            <a:r>
+              <a:rPr lang="en-US" sz="1500" dirty="0">
+                <a:solidFill>
+                  <a:schemeClr val="accent2"/>
+                </a:solidFill>
+              </a:rPr>
+              <a:t>feature</a:t>
+            </a:r>
+            <a:r>
+              <a:rPr lang="en-US" sz="1500" dirty="0"/>
+              <a:t>, </a:t>
+            </a:r>
+            <a:r>
+              <a:rPr lang="en-US" sz="1500" dirty="0" err="1">
+                <a:solidFill>
+                  <a:schemeClr val="accent2"/>
+                </a:solidFill>
+              </a:rPr>
+              <a:t>animal_remains</a:t>
+            </a:r>
+            <a:r>
+              <a:rPr lang="en-US" sz="1500" dirty="0"/>
+              <a:t>, </a:t>
+            </a:r>
+            <a:r>
+              <a:rPr lang="en-US" sz="1500" dirty="0">
+                <a:solidFill>
+                  <a:schemeClr val="accent2"/>
+                </a:solidFill>
+              </a:rPr>
+              <a:t>paleofauna</a:t>
+            </a:r>
+            <a:r>
+              <a:rPr lang="en-US" sz="1500" dirty="0"/>
+              <a:t>, </a:t>
+            </a:r>
+            <a:r>
+              <a:rPr lang="en-US" sz="1500" dirty="0" err="1">
+                <a:solidFill>
+                  <a:schemeClr val="accent2"/>
+                </a:solidFill>
+              </a:rPr>
+              <a:t>plant_remains</a:t>
+            </a:r>
+            <a:r>
+              <a:rPr lang="en-US" sz="1500" dirty="0"/>
+              <a:t>, </a:t>
+            </a:r>
+            <a:r>
+              <a:rPr lang="en-US" sz="1500" dirty="0" err="1">
+                <a:solidFill>
+                  <a:schemeClr val="accent2"/>
+                </a:solidFill>
+              </a:rPr>
+              <a:t>human_remains</a:t>
+            </a:r>
+            <a:r>
+              <a:rPr lang="en-US" sz="1500" dirty="0"/>
+              <a:t>, </a:t>
+            </a:r>
+            <a:r>
+              <a:rPr lang="en-US" sz="1500" dirty="0" err="1">
+                <a:solidFill>
+                  <a:schemeClr val="accent6"/>
+                </a:solidFill>
+              </a:rPr>
+              <a:t>synthesized_age_min</a:t>
+            </a:r>
+            <a:r>
+              <a:rPr lang="en-US" sz="1500" dirty="0"/>
+              <a:t>, </a:t>
+            </a:r>
+            <a:r>
+              <a:rPr lang="en-US" sz="1500" dirty="0" err="1">
+                <a:solidFill>
+                  <a:schemeClr val="accent6"/>
+                </a:solidFill>
+              </a:rPr>
+              <a:t>synthesized_age_max</a:t>
+            </a:r>
+            <a:r>
+              <a:rPr lang="en-US" sz="1500" dirty="0"/>
+              <a:t>, </a:t>
+            </a:r>
+            <a:r>
+              <a:rPr lang="en-US" sz="1500" dirty="0" err="1">
+                <a:solidFill>
+                  <a:schemeClr val="accent5"/>
+                </a:solidFill>
+              </a:rPr>
+              <a:t>geolayer</a:t>
+            </a:r>
+            <a:r>
+              <a:rPr lang="en-US" sz="1500" dirty="0">
+                <a:solidFill>
+                  <a:schemeClr val="accent5"/>
+                </a:solidFill>
+              </a:rPr>
+              <a:t>, </a:t>
+            </a:r>
+            <a:r>
+              <a:rPr lang="en-US" sz="1500" dirty="0" err="1">
+                <a:solidFill>
+                  <a:schemeClr val="accent5"/>
+                </a:solidFill>
+              </a:rPr>
+              <a:t>archaeoleayer</a:t>
+            </a:r>
+            <a:r>
+              <a:rPr lang="en-US" sz="1500" dirty="0">
+                <a:solidFill>
+                  <a:schemeClr val="accent5"/>
+                </a:solidFill>
+              </a:rPr>
+              <a:t>;</a:t>
+            </a:r>
+            <a:endParaRPr lang="en-DE" sz="1500" dirty="0"/>
+          </a:p>
+        </p:txBody>
+      </p:sp>
+      <p:sp>
+        <p:nvSpPr>
+          <p:cNvPr id="17" name="TextBox 16">
+            <a:extLst>
+              <a:ext uri="{FF2B5EF4-FFF2-40B4-BE49-F238E27FC236}">
+                <a16:creationId xmlns:a16="http://schemas.microsoft.com/office/drawing/2014/main" id="{60A127FC-71F0-46B2-1297-62F07F2D9823}"/>
+              </a:ext>
+            </a:extLst>
+          </p:cNvPr>
+          <p:cNvSpPr txBox="1"/>
+          <p:nvPr/>
+        </p:nvSpPr>
+        <p:spPr>
+          <a:xfrm>
+            <a:off x="8657490" y="3429000"/>
+            <a:ext cx="2696308" cy="2031325"/>
+          </a:xfrm>
+          <a:prstGeom prst="rect">
+            <a:avLst/>
+          </a:prstGeom>
+          <a:noFill/>
+        </p:spPr>
+        <p:txBody>
+          <a:bodyPr wrap="square" rtlCol="0">
+            <a:spAutoFit/>
+          </a:bodyPr>
+          <a:lstStyle/>
+          <a:p>
+            <a:r>
+              <a:rPr lang="en-US" dirty="0"/>
+              <a:t>Columns:</a:t>
+            </a:r>
+          </a:p>
+          <a:p>
+            <a:r>
+              <a:rPr lang="en-US" sz="1500" i="1" dirty="0"/>
+              <a:t>Some from assemblage plus</a:t>
+            </a:r>
+            <a:endParaRPr lang="en-US" sz="1500" dirty="0"/>
+          </a:p>
+          <a:p>
+            <a:r>
+              <a:rPr lang="en-US" sz="1500" dirty="0">
+                <a:solidFill>
+                  <a:schemeClr val="accent6"/>
+                </a:solidFill>
+              </a:rPr>
+              <a:t>age</a:t>
+            </a:r>
+            <a:r>
+              <a:rPr lang="en-US" sz="1500" dirty="0"/>
+              <a:t>, </a:t>
+            </a:r>
+            <a:r>
+              <a:rPr lang="en-US" sz="1500" dirty="0" err="1">
+                <a:solidFill>
+                  <a:schemeClr val="accent6"/>
+                </a:solidFill>
+              </a:rPr>
+              <a:t>age_stdev_plus</a:t>
+            </a:r>
+            <a:r>
+              <a:rPr lang="en-US" sz="1500" dirty="0"/>
+              <a:t>, </a:t>
+            </a:r>
+            <a:r>
+              <a:rPr lang="en-US" sz="1500" dirty="0" err="1">
+                <a:solidFill>
+                  <a:schemeClr val="accent6"/>
+                </a:solidFill>
+              </a:rPr>
+              <a:t>age_stdev_minus</a:t>
+            </a:r>
+            <a:r>
+              <a:rPr lang="en-US" sz="1500" dirty="0"/>
+              <a:t>, </a:t>
+            </a:r>
+            <a:r>
+              <a:rPr lang="en-US" sz="1500" dirty="0" err="1">
+                <a:solidFill>
+                  <a:schemeClr val="accent1"/>
+                </a:solidFill>
+              </a:rPr>
+              <a:t>dating_method</a:t>
+            </a:r>
+            <a:r>
+              <a:rPr lang="en-US" sz="1500" dirty="0"/>
+              <a:t>, </a:t>
+            </a:r>
+            <a:r>
+              <a:rPr lang="en-US" sz="1500" dirty="0">
+                <a:solidFill>
+                  <a:schemeClr val="accent1"/>
+                </a:solidFill>
+              </a:rPr>
+              <a:t>material</a:t>
+            </a:r>
+            <a:r>
+              <a:rPr lang="en-US" sz="1500" dirty="0"/>
+              <a:t>, </a:t>
+            </a:r>
+            <a:r>
+              <a:rPr lang="en-US" sz="1500" dirty="0" err="1">
+                <a:solidFill>
+                  <a:schemeClr val="accent1"/>
+                </a:solidFill>
+              </a:rPr>
+              <a:t>lab_number</a:t>
+            </a:r>
+            <a:r>
+              <a:rPr lang="en-US" sz="1500" dirty="0">
+                <a:solidFill>
+                  <a:schemeClr val="accent1"/>
+                </a:solidFill>
+              </a:rPr>
+              <a:t>, lab</a:t>
+            </a:r>
+            <a:r>
+              <a:rPr lang="en-US" sz="1500" dirty="0"/>
+              <a:t>, </a:t>
+            </a:r>
+            <a:r>
+              <a:rPr lang="en-US" sz="1500" dirty="0">
+                <a:solidFill>
+                  <a:schemeClr val="accent6"/>
+                </a:solidFill>
+              </a:rPr>
+              <a:t>y</a:t>
+            </a:r>
+            <a:r>
+              <a:rPr lang="en-US" sz="1500" dirty="0"/>
+              <a:t>, </a:t>
+            </a:r>
+            <a:r>
+              <a:rPr lang="en-US" sz="1500" dirty="0" err="1">
+                <a:solidFill>
+                  <a:schemeClr val="accent1"/>
+                </a:solidFill>
+              </a:rPr>
+              <a:t>geolayer</a:t>
+            </a:r>
+            <a:r>
+              <a:rPr lang="en-US" sz="1500" dirty="0">
+                <a:solidFill>
+                  <a:schemeClr val="accent1"/>
+                </a:solidFill>
+              </a:rPr>
+              <a:t>, </a:t>
+            </a:r>
+            <a:r>
+              <a:rPr lang="en-US" sz="1500" dirty="0" err="1">
+                <a:solidFill>
+                  <a:schemeClr val="accent1"/>
+                </a:solidFill>
+              </a:rPr>
+              <a:t>archaeolayer</a:t>
+            </a:r>
+            <a:r>
+              <a:rPr lang="en-US" sz="1500" dirty="0"/>
+              <a:t>;</a:t>
+            </a:r>
+          </a:p>
+          <a:p>
+            <a:endParaRPr lang="en-US" i="1" dirty="0"/>
+          </a:p>
+        </p:txBody>
+      </p:sp>
+      <p:sp>
+        <p:nvSpPr>
+          <p:cNvPr id="18" name="TextBox 17">
+            <a:extLst>
+              <a:ext uri="{FF2B5EF4-FFF2-40B4-BE49-F238E27FC236}">
+                <a16:creationId xmlns:a16="http://schemas.microsoft.com/office/drawing/2014/main" id="{6BD77C82-9715-EC46-7088-1789BE4D957A}"/>
+              </a:ext>
+            </a:extLst>
+          </p:cNvPr>
+          <p:cNvSpPr txBox="1"/>
+          <p:nvPr/>
+        </p:nvSpPr>
+        <p:spPr>
+          <a:xfrm>
+            <a:off x="0" y="5688449"/>
+            <a:ext cx="1429366" cy="1169551"/>
+          </a:xfrm>
+          <a:prstGeom prst="rect">
+            <a:avLst/>
+          </a:prstGeom>
+          <a:noFill/>
+          <a:ln>
+            <a:solidFill>
+              <a:schemeClr val="tx1"/>
+            </a:solidFill>
+            <a:prstDash val="dash"/>
+          </a:ln>
+        </p:spPr>
+        <p:txBody>
+          <a:bodyPr wrap="none" rtlCol="0">
+            <a:spAutoFit/>
+          </a:bodyPr>
+          <a:lstStyle/>
+          <a:p>
+            <a:r>
+              <a:rPr lang="en-US" sz="1400" dirty="0"/>
+              <a:t>Color key:</a:t>
+            </a:r>
+          </a:p>
+          <a:p>
+            <a:r>
+              <a:rPr lang="en-US" sz="1400" dirty="0">
+                <a:solidFill>
+                  <a:schemeClr val="accent1"/>
+                </a:solidFill>
+              </a:rPr>
+              <a:t>Character string</a:t>
+            </a:r>
+          </a:p>
+          <a:p>
+            <a:r>
+              <a:rPr lang="en-US" sz="1400" dirty="0">
+                <a:solidFill>
+                  <a:schemeClr val="accent6"/>
+                </a:solidFill>
+              </a:rPr>
+              <a:t>Numeric</a:t>
+            </a:r>
+          </a:p>
+          <a:p>
+            <a:r>
+              <a:rPr lang="en-US" sz="1400" dirty="0">
+                <a:solidFill>
+                  <a:schemeClr val="accent2"/>
+                </a:solidFill>
+              </a:rPr>
+              <a:t>Boolean</a:t>
+            </a:r>
+          </a:p>
+          <a:p>
+            <a:r>
+              <a:rPr lang="en-US" sz="1400" dirty="0">
+                <a:solidFill>
+                  <a:schemeClr val="accent5"/>
+                </a:solidFill>
+              </a:rPr>
+              <a:t>List</a:t>
+            </a:r>
+          </a:p>
+        </p:txBody>
+      </p:sp>
+      <p:sp>
+        <p:nvSpPr>
+          <p:cNvPr id="19" name="Rectangle 18">
+            <a:extLst>
+              <a:ext uri="{FF2B5EF4-FFF2-40B4-BE49-F238E27FC236}">
+                <a16:creationId xmlns:a16="http://schemas.microsoft.com/office/drawing/2014/main" id="{483C33BA-D3D5-1330-6B56-EF3816044774}"/>
+              </a:ext>
+            </a:extLst>
+          </p:cNvPr>
+          <p:cNvSpPr/>
+          <p:nvPr/>
+        </p:nvSpPr>
+        <p:spPr>
+          <a:xfrm>
+            <a:off x="838200" y="1957756"/>
+            <a:ext cx="2696308" cy="1078524"/>
+          </a:xfrm>
+          <a:prstGeom prst="rect">
+            <a:avLst/>
+          </a:prstGeom>
+          <a:solidFill>
+            <a:schemeClr val="bg1">
+              <a:lumMod val="95000"/>
+            </a:schemeClr>
+          </a:solidFill>
+        </p:spPr>
+        <p:style>
+          <a:lnRef idx="2">
+            <a:schemeClr val="accent1">
+              <a:shade val="15000"/>
+            </a:schemeClr>
+          </a:lnRef>
+          <a:fillRef idx="1">
+            <a:schemeClr val="accent1"/>
+          </a:fillRef>
+          <a:effectRef idx="0">
+            <a:schemeClr val="accent1"/>
+          </a:effectRef>
+          <a:fontRef idx="minor">
+            <a:schemeClr val="lt1"/>
+          </a:fontRef>
+        </p:style>
+        <p:txBody>
+          <a:bodyPr rtlCol="0" anchor="ctr"/>
+          <a:lstStyle/>
+          <a:p>
+            <a:pPr algn="ctr"/>
+            <a:r>
+              <a:rPr lang="en-US" dirty="0">
+                <a:solidFill>
+                  <a:schemeClr val="tx1"/>
+                </a:solidFill>
+              </a:rPr>
+              <a:t>Locality</a:t>
+            </a:r>
+          </a:p>
+          <a:p>
+            <a:pPr algn="ctr"/>
+            <a:r>
+              <a:rPr lang="en-US" sz="1400" dirty="0" err="1">
+                <a:solidFill>
+                  <a:schemeClr val="tx1"/>
+                </a:solidFill>
+              </a:rPr>
+              <a:t>road_get_localities</a:t>
+            </a:r>
+            <a:r>
+              <a:rPr lang="en-US" sz="1400" dirty="0">
+                <a:solidFill>
+                  <a:schemeClr val="tx1"/>
+                </a:solidFill>
+              </a:rPr>
+              <a:t>()</a:t>
+            </a:r>
+            <a:endParaRPr lang="en-DE" sz="1400" dirty="0">
+              <a:solidFill>
+                <a:schemeClr val="tx1"/>
+              </a:solidFill>
+            </a:endParaRPr>
+          </a:p>
+        </p:txBody>
+      </p:sp>
+      <p:sp>
+        <p:nvSpPr>
+          <p:cNvPr id="20" name="Rectangle 19">
+            <a:extLst>
+              <a:ext uri="{FF2B5EF4-FFF2-40B4-BE49-F238E27FC236}">
+                <a16:creationId xmlns:a16="http://schemas.microsoft.com/office/drawing/2014/main" id="{EB7C140D-A8BF-1B91-F6B4-182C760F749F}"/>
+              </a:ext>
+            </a:extLst>
+          </p:cNvPr>
+          <p:cNvSpPr/>
+          <p:nvPr/>
+        </p:nvSpPr>
+        <p:spPr>
+          <a:xfrm>
+            <a:off x="4747846" y="1957756"/>
+            <a:ext cx="2696308" cy="1078524"/>
+          </a:xfrm>
+          <a:prstGeom prst="rect">
+            <a:avLst/>
+          </a:prstGeom>
+          <a:solidFill>
+            <a:schemeClr val="bg1">
+              <a:lumMod val="95000"/>
+            </a:schemeClr>
+          </a:solidFill>
+        </p:spPr>
+        <p:style>
+          <a:lnRef idx="2">
+            <a:schemeClr val="accent1">
+              <a:shade val="15000"/>
+            </a:schemeClr>
+          </a:lnRef>
+          <a:fillRef idx="1">
+            <a:schemeClr val="accent1"/>
+          </a:fillRef>
+          <a:effectRef idx="0">
+            <a:schemeClr val="accent1"/>
+          </a:effectRef>
+          <a:fontRef idx="minor">
+            <a:schemeClr val="lt1"/>
+          </a:fontRef>
+        </p:style>
+        <p:txBody>
+          <a:bodyPr rtlCol="0" anchor="ctr"/>
+          <a:lstStyle/>
+          <a:p>
+            <a:pPr algn="ctr"/>
+            <a:r>
+              <a:rPr lang="en-US" dirty="0">
+                <a:solidFill>
+                  <a:schemeClr val="tx1"/>
+                </a:solidFill>
+              </a:rPr>
+              <a:t>Assemblage</a:t>
+            </a:r>
+            <a:br>
+              <a:rPr lang="en-US" dirty="0">
+                <a:solidFill>
+                  <a:schemeClr val="tx1"/>
+                </a:solidFill>
+              </a:rPr>
+            </a:br>
+            <a:r>
+              <a:rPr lang="en-US" sz="1400" dirty="0" err="1">
+                <a:solidFill>
+                  <a:schemeClr val="tx1"/>
+                </a:solidFill>
+              </a:rPr>
+              <a:t>road_get_assemblages</a:t>
+            </a:r>
+            <a:r>
+              <a:rPr lang="en-US" sz="1400" dirty="0">
+                <a:solidFill>
+                  <a:schemeClr val="tx1"/>
+                </a:solidFill>
+              </a:rPr>
+              <a:t>()</a:t>
+            </a:r>
+            <a:endParaRPr lang="en-DE" dirty="0">
+              <a:solidFill>
+                <a:schemeClr val="tx1"/>
+              </a:solidFill>
+            </a:endParaRPr>
+          </a:p>
+        </p:txBody>
+      </p:sp>
+      <p:sp>
+        <p:nvSpPr>
+          <p:cNvPr id="21" name="Rectangle 20">
+            <a:extLst>
+              <a:ext uri="{FF2B5EF4-FFF2-40B4-BE49-F238E27FC236}">
+                <a16:creationId xmlns:a16="http://schemas.microsoft.com/office/drawing/2014/main" id="{74245958-71B2-30EB-5CB6-138AC1491212}"/>
+              </a:ext>
+            </a:extLst>
+          </p:cNvPr>
+          <p:cNvSpPr/>
+          <p:nvPr/>
+        </p:nvSpPr>
+        <p:spPr>
+          <a:xfrm>
+            <a:off x="8657492" y="1957756"/>
+            <a:ext cx="2696308" cy="1078524"/>
+          </a:xfrm>
+          <a:prstGeom prst="rect">
+            <a:avLst/>
+          </a:prstGeom>
+          <a:solidFill>
+            <a:schemeClr val="bg1">
+              <a:lumMod val="95000"/>
+            </a:schemeClr>
+          </a:solidFill>
+        </p:spPr>
+        <p:style>
+          <a:lnRef idx="2">
+            <a:schemeClr val="accent1">
+              <a:shade val="15000"/>
+            </a:schemeClr>
+          </a:lnRef>
+          <a:fillRef idx="1">
+            <a:schemeClr val="accent1"/>
+          </a:fillRef>
+          <a:effectRef idx="0">
+            <a:schemeClr val="accent1"/>
+          </a:effectRef>
+          <a:fontRef idx="minor">
+            <a:schemeClr val="lt1"/>
+          </a:fontRef>
+        </p:style>
+        <p:txBody>
+          <a:bodyPr rtlCol="0" anchor="ctr"/>
+          <a:lstStyle/>
+          <a:p>
+            <a:pPr algn="ctr"/>
+            <a:r>
+              <a:rPr lang="en-US" dirty="0">
+                <a:solidFill>
+                  <a:schemeClr val="tx1"/>
+                </a:solidFill>
+              </a:rPr>
+              <a:t>Date</a:t>
+            </a:r>
+            <a:br>
+              <a:rPr lang="en-US" dirty="0">
+                <a:solidFill>
+                  <a:schemeClr val="tx1"/>
+                </a:solidFill>
+              </a:rPr>
+            </a:br>
+            <a:r>
+              <a:rPr lang="en-US" sz="1400" dirty="0" err="1">
+                <a:solidFill>
+                  <a:schemeClr val="tx1"/>
+                </a:solidFill>
+              </a:rPr>
+              <a:t>road_get_dates</a:t>
+            </a:r>
+            <a:r>
+              <a:rPr lang="en-US" sz="1400" dirty="0">
+                <a:solidFill>
+                  <a:schemeClr val="tx1"/>
+                </a:solidFill>
+              </a:rPr>
+              <a:t>()</a:t>
+            </a:r>
+            <a:endParaRPr lang="en-DE" dirty="0">
+              <a:solidFill>
+                <a:schemeClr val="tx1"/>
+              </a:solidFill>
+            </a:endParaRPr>
+          </a:p>
+        </p:txBody>
+      </p:sp>
+      <p:cxnSp>
+        <p:nvCxnSpPr>
+          <p:cNvPr id="22" name="Straight Arrow Connector 21">
+            <a:extLst>
+              <a:ext uri="{FF2B5EF4-FFF2-40B4-BE49-F238E27FC236}">
+                <a16:creationId xmlns:a16="http://schemas.microsoft.com/office/drawing/2014/main" id="{1EF299C4-1F55-93C3-E792-A7DF7F528E94}"/>
+              </a:ext>
+            </a:extLst>
+          </p:cNvPr>
+          <p:cNvCxnSpPr>
+            <a:cxnSpLocks/>
+            <a:stCxn id="19" idx="3"/>
+            <a:endCxn id="20" idx="1"/>
+          </p:cNvCxnSpPr>
+          <p:nvPr/>
+        </p:nvCxnSpPr>
+        <p:spPr>
+          <a:xfrm>
+            <a:off x="3534508" y="2497018"/>
+            <a:ext cx="1213338" cy="0"/>
+          </a:xfrm>
+          <a:prstGeom prst="straightConnector1">
+            <a:avLst/>
+          </a:prstGeom>
+          <a:ln>
+            <a:solidFill>
+              <a:schemeClr val="tx1"/>
+            </a:solidFill>
+            <a:tailEnd type="triangle"/>
+          </a:ln>
+        </p:spPr>
+        <p:style>
+          <a:lnRef idx="2">
+            <a:schemeClr val="accent1"/>
+          </a:lnRef>
+          <a:fillRef idx="0">
+            <a:schemeClr val="accent1"/>
+          </a:fillRef>
+          <a:effectRef idx="1">
+            <a:schemeClr val="accent1"/>
+          </a:effectRef>
+          <a:fontRef idx="minor">
+            <a:schemeClr val="tx1"/>
+          </a:fontRef>
+        </p:style>
+      </p:cxnSp>
+      <p:cxnSp>
+        <p:nvCxnSpPr>
+          <p:cNvPr id="23" name="Straight Arrow Connector 22">
+            <a:extLst>
+              <a:ext uri="{FF2B5EF4-FFF2-40B4-BE49-F238E27FC236}">
+                <a16:creationId xmlns:a16="http://schemas.microsoft.com/office/drawing/2014/main" id="{727A024E-ECFE-A086-7D2F-644ECA0B6231}"/>
+              </a:ext>
+            </a:extLst>
+          </p:cNvPr>
+          <p:cNvCxnSpPr>
+            <a:cxnSpLocks/>
+            <a:stCxn id="20" idx="3"/>
+            <a:endCxn id="21" idx="1"/>
+          </p:cNvCxnSpPr>
+          <p:nvPr/>
+        </p:nvCxnSpPr>
+        <p:spPr>
+          <a:xfrm>
+            <a:off x="7444154" y="2497018"/>
+            <a:ext cx="1213338" cy="0"/>
+          </a:xfrm>
+          <a:prstGeom prst="straightConnector1">
+            <a:avLst/>
+          </a:prstGeom>
+          <a:ln>
+            <a:solidFill>
+              <a:schemeClr val="tx1"/>
+            </a:solidFill>
+            <a:tailEnd type="triangle"/>
+          </a:ln>
+        </p:spPr>
+        <p:style>
+          <a:lnRef idx="2">
+            <a:schemeClr val="accent1"/>
+          </a:lnRef>
+          <a:fillRef idx="0">
+            <a:schemeClr val="accent1"/>
+          </a:fillRef>
+          <a:effectRef idx="1">
+            <a:schemeClr val="accent1"/>
+          </a:effectRef>
+          <a:fontRef idx="minor">
+            <a:schemeClr val="tx1"/>
+          </a:fontRef>
+        </p:style>
+      </p:cxnSp>
+      <p:pic>
+        <p:nvPicPr>
+          <p:cNvPr id="24" name="Graphic 23" descr="Layers Design with solid fill">
+            <a:extLst>
+              <a:ext uri="{FF2B5EF4-FFF2-40B4-BE49-F238E27FC236}">
+                <a16:creationId xmlns:a16="http://schemas.microsoft.com/office/drawing/2014/main" id="{93790E32-2DEB-4E17-1BF8-7D345255F412}"/>
+              </a:ext>
+            </a:extLst>
+          </p:cNvPr>
+          <p:cNvPicPr>
+            <a:picLocks noChangeAspect="1"/>
+          </p:cNvPicPr>
+          <p:nvPr/>
+        </p:nvPicPr>
+        <p:blipFill>
+          <a:blip r:embed="rId2">
+            <a:extLst>
+              <a:ext uri="{96DAC541-7B7A-43D3-8B79-37D633B846F1}">
+                <asvg:svgBlip xmlns:asvg="http://schemas.microsoft.com/office/drawing/2016/SVG/main" r:embed="rId3"/>
+              </a:ext>
+            </a:extLst>
+          </a:blip>
+          <a:stretch>
+            <a:fillRect/>
+          </a:stretch>
+        </p:blipFill>
+        <p:spPr>
+          <a:xfrm>
+            <a:off x="4965367" y="2149591"/>
+            <a:ext cx="432000" cy="432000"/>
+          </a:xfrm>
+          <a:prstGeom prst="rect">
+            <a:avLst/>
+          </a:prstGeom>
+        </p:spPr>
+      </p:pic>
+      <p:pic>
+        <p:nvPicPr>
+          <p:cNvPr id="25" name="Graphic 24" descr="Marker with solid fill">
+            <a:extLst>
+              <a:ext uri="{FF2B5EF4-FFF2-40B4-BE49-F238E27FC236}">
+                <a16:creationId xmlns:a16="http://schemas.microsoft.com/office/drawing/2014/main" id="{C8123CBC-3550-E2DB-4728-E8D00091D3F4}"/>
+              </a:ext>
+            </a:extLst>
+          </p:cNvPr>
+          <p:cNvPicPr>
+            <a:picLocks noChangeAspect="1"/>
+          </p:cNvPicPr>
+          <p:nvPr/>
+        </p:nvPicPr>
+        <p:blipFill>
+          <a:blip r:embed="rId4">
+            <a:extLst>
+              <a:ext uri="{96DAC541-7B7A-43D3-8B79-37D633B846F1}">
+                <asvg:svgBlip xmlns:asvg="http://schemas.microsoft.com/office/drawing/2016/SVG/main" r:embed="rId5"/>
+              </a:ext>
+            </a:extLst>
+          </a:blip>
+          <a:stretch>
+            <a:fillRect/>
+          </a:stretch>
+        </p:blipFill>
+        <p:spPr>
+          <a:xfrm>
+            <a:off x="1396014" y="2149591"/>
+            <a:ext cx="432000" cy="432000"/>
+          </a:xfrm>
+          <a:prstGeom prst="rect">
+            <a:avLst/>
+          </a:prstGeom>
+        </p:spPr>
+      </p:pic>
+      <p:pic>
+        <p:nvPicPr>
+          <p:cNvPr id="26" name="Graphic 25" descr="Hourglass Finished with solid fill">
+            <a:extLst>
+              <a:ext uri="{FF2B5EF4-FFF2-40B4-BE49-F238E27FC236}">
+                <a16:creationId xmlns:a16="http://schemas.microsoft.com/office/drawing/2014/main" id="{B70D7F0F-72E3-E442-F5A6-8362C556D6E9}"/>
+              </a:ext>
+            </a:extLst>
+          </p:cNvPr>
+          <p:cNvPicPr>
+            <a:picLocks noChangeAspect="1"/>
+          </p:cNvPicPr>
+          <p:nvPr/>
+        </p:nvPicPr>
+        <p:blipFill>
+          <a:blip r:embed="rId6">
+            <a:extLst>
+              <a:ext uri="{96DAC541-7B7A-43D3-8B79-37D633B846F1}">
+                <asvg:svgBlip xmlns:asvg="http://schemas.microsoft.com/office/drawing/2016/SVG/main" r:embed="rId7"/>
+              </a:ext>
+            </a:extLst>
+          </a:blip>
+          <a:stretch>
+            <a:fillRect/>
+          </a:stretch>
+        </p:blipFill>
+        <p:spPr>
+          <a:xfrm>
+            <a:off x="9386133" y="2190344"/>
+            <a:ext cx="360000" cy="360000"/>
+          </a:xfrm>
+          <a:prstGeom prst="rect">
+            <a:avLst/>
+          </a:prstGeom>
+        </p:spPr>
+      </p:pic>
+    </p:spTree>
+    <p:extLst>
+      <p:ext uri="{BB962C8B-B14F-4D97-AF65-F5344CB8AC3E}">
+        <p14:creationId xmlns:p14="http://schemas.microsoft.com/office/powerpoint/2010/main" val="3099776161"/>
       </p:ext>
     </p:extLst>
   </p:cSld>
